--- a/public/videos/repositories/local-service-finder/local-service-finder-tech-preview.pptx
+++ b/public/videos/repositories/local-service-finder/local-service-finder-tech-preview.pptx
@@ -134,7 +134,7 @@
           <p:cNvPr id="2" name="タイトル 1">
             <a:extLst>
               <a:ext uri="{FF2B5EF4-FFF2-40B4-BE49-F238E27FC236}">
-                <a16:creationId xmlns:a16="http://schemas.microsoft.com/office/drawing/2014/main" id="{B2F953C3-8885-E489-E7F4-7EF9C33493D7}"/>
+                <a16:creationId xmlns:a16="http://schemas.microsoft.com/office/drawing/2014/main" id="{A49DDDD8-AB08-9F65-637D-26B723B30DA0}"/>
               </a:ext>
             </a:extLst>
           </p:cNvPr>
@@ -171,7 +171,7 @@
           <p:cNvPr id="3" name="字幕 2">
             <a:extLst>
               <a:ext uri="{FF2B5EF4-FFF2-40B4-BE49-F238E27FC236}">
-                <a16:creationId xmlns:a16="http://schemas.microsoft.com/office/drawing/2014/main" id="{59EE5C76-DD38-5CAF-4A72-3A01FB4E8459}"/>
+                <a16:creationId xmlns:a16="http://schemas.microsoft.com/office/drawing/2014/main" id="{1897F1E6-98FE-D88A-E48C-138EFF4B3AA4}"/>
               </a:ext>
             </a:extLst>
           </p:cNvPr>
@@ -241,7 +241,7 @@
           <p:cNvPr id="4" name="日付プレースホルダー 3">
             <a:extLst>
               <a:ext uri="{FF2B5EF4-FFF2-40B4-BE49-F238E27FC236}">
-                <a16:creationId xmlns:a16="http://schemas.microsoft.com/office/drawing/2014/main" id="{B5F46D16-6CFC-FEE0-C4A0-B0CEADB32976}"/>
+                <a16:creationId xmlns:a16="http://schemas.microsoft.com/office/drawing/2014/main" id="{4EB30B4A-17D9-E626-AAD3-538A7A458B7E}"/>
               </a:ext>
             </a:extLst>
           </p:cNvPr>
@@ -257,7 +257,7 @@
           <a:bodyPr/>
           <a:lstStyle/>
           <a:p>
-            <a:fld id="{29CD5C1E-DAEB-4845-87E9-F55D79C7ED6B}" type="datetimeFigureOut">
+            <a:fld id="{47C164C1-C361-41F3-8408-E012A298061A}" type="datetimeFigureOut">
               <a:rPr kumimoji="1" lang="ja-JP" altLang="en-US" smtClean="0"/>
               <a:t>2026/7/30</a:t>
             </a:fld>
@@ -270,7 +270,7 @@
           <p:cNvPr id="5" name="フッター プレースホルダー 4">
             <a:extLst>
               <a:ext uri="{FF2B5EF4-FFF2-40B4-BE49-F238E27FC236}">
-                <a16:creationId xmlns:a16="http://schemas.microsoft.com/office/drawing/2014/main" id="{4B1F5B7D-DFF3-B4A6-8CBC-3AAF1BFBDDB0}"/>
+                <a16:creationId xmlns:a16="http://schemas.microsoft.com/office/drawing/2014/main" id="{C9C87354-1674-44C7-96FE-CFEB44F167E3}"/>
               </a:ext>
             </a:extLst>
           </p:cNvPr>
@@ -295,7 +295,7 @@
           <p:cNvPr id="6" name="スライド番号プレースホルダー 5">
             <a:extLst>
               <a:ext uri="{FF2B5EF4-FFF2-40B4-BE49-F238E27FC236}">
-                <a16:creationId xmlns:a16="http://schemas.microsoft.com/office/drawing/2014/main" id="{5F315D48-BC13-BA85-7694-B75EFF00A45C}"/>
+                <a16:creationId xmlns:a16="http://schemas.microsoft.com/office/drawing/2014/main" id="{419D29D6-5846-4270-CA3D-98B2067A9966}"/>
               </a:ext>
             </a:extLst>
           </p:cNvPr>
@@ -311,7 +311,7 @@
           <a:bodyPr/>
           <a:lstStyle/>
           <a:p>
-            <a:fld id="{BC81F3A5-ECEF-4C17-B784-6332A8EA5E38}" type="slidenum">
+            <a:fld id="{EA8BC1D6-A548-4A62-A106-3BCC4D337BCD}" type="slidenum">
               <a:rPr kumimoji="1" lang="ja-JP" altLang="en-US" smtClean="0"/>
               <a:t>‹#›</a:t>
             </a:fld>
@@ -322,7 +322,7 @@
     </p:spTree>
     <p:extLst>
       <p:ext uri="{BB962C8B-B14F-4D97-AF65-F5344CB8AC3E}">
-        <p14:creationId xmlns:p14="http://schemas.microsoft.com/office/powerpoint/2010/main" val="1057506583"/>
+        <p14:creationId xmlns:p14="http://schemas.microsoft.com/office/powerpoint/2010/main" val="1844857656"/>
       </p:ext>
     </p:extLst>
   </p:cSld>
@@ -354,7 +354,7 @@
           <p:cNvPr id="2" name="タイトル 1">
             <a:extLst>
               <a:ext uri="{FF2B5EF4-FFF2-40B4-BE49-F238E27FC236}">
-                <a16:creationId xmlns:a16="http://schemas.microsoft.com/office/drawing/2014/main" id="{52D19723-CD90-F49C-79E9-63A8A9AF1E33}"/>
+                <a16:creationId xmlns:a16="http://schemas.microsoft.com/office/drawing/2014/main" id="{2ED3540B-39A4-4E1A-04E7-DD9F700EE211}"/>
               </a:ext>
             </a:extLst>
           </p:cNvPr>
@@ -382,7 +382,7 @@
           <p:cNvPr id="3" name="縦書きテキスト プレースホルダー 2">
             <a:extLst>
               <a:ext uri="{FF2B5EF4-FFF2-40B4-BE49-F238E27FC236}">
-                <a16:creationId xmlns:a16="http://schemas.microsoft.com/office/drawing/2014/main" id="{640C759C-39A0-6B53-7AB6-816BC27C19C5}"/>
+                <a16:creationId xmlns:a16="http://schemas.microsoft.com/office/drawing/2014/main" id="{99A6EE56-C676-E8B9-E861-A87C3BC52CFA}"/>
               </a:ext>
             </a:extLst>
           </p:cNvPr>
@@ -471,7 +471,7 @@
           <p:cNvPr id="4" name="日付プレースホルダー 3">
             <a:extLst>
               <a:ext uri="{FF2B5EF4-FFF2-40B4-BE49-F238E27FC236}">
-                <a16:creationId xmlns:a16="http://schemas.microsoft.com/office/drawing/2014/main" id="{3E7FEB36-4D30-8CFC-A50F-744ACE3BB957}"/>
+                <a16:creationId xmlns:a16="http://schemas.microsoft.com/office/drawing/2014/main" id="{B1FA7B01-19FB-047C-A3F8-409B1F32F9F6}"/>
               </a:ext>
             </a:extLst>
           </p:cNvPr>
@@ -487,7 +487,7 @@
           <a:bodyPr/>
           <a:lstStyle/>
           <a:p>
-            <a:fld id="{29CD5C1E-DAEB-4845-87E9-F55D79C7ED6B}" type="datetimeFigureOut">
+            <a:fld id="{47C164C1-C361-41F3-8408-E012A298061A}" type="datetimeFigureOut">
               <a:rPr kumimoji="1" lang="ja-JP" altLang="en-US" smtClean="0"/>
               <a:t>2026/7/30</a:t>
             </a:fld>
@@ -500,7 +500,7 @@
           <p:cNvPr id="5" name="フッター プレースホルダー 4">
             <a:extLst>
               <a:ext uri="{FF2B5EF4-FFF2-40B4-BE49-F238E27FC236}">
-                <a16:creationId xmlns:a16="http://schemas.microsoft.com/office/drawing/2014/main" id="{42A15FDA-A525-2C6A-F203-F4FDBBCBBD78}"/>
+                <a16:creationId xmlns:a16="http://schemas.microsoft.com/office/drawing/2014/main" id="{3C5E4303-E986-B67F-3F33-F99BDC1C708C}"/>
               </a:ext>
             </a:extLst>
           </p:cNvPr>
@@ -525,7 +525,7 @@
           <p:cNvPr id="6" name="スライド番号プレースホルダー 5">
             <a:extLst>
               <a:ext uri="{FF2B5EF4-FFF2-40B4-BE49-F238E27FC236}">
-                <a16:creationId xmlns:a16="http://schemas.microsoft.com/office/drawing/2014/main" id="{F3CEFFEC-0202-1ECB-39BF-54CAAAC20130}"/>
+                <a16:creationId xmlns:a16="http://schemas.microsoft.com/office/drawing/2014/main" id="{29289741-3E75-1954-3C2B-F5CFF6F2B34B}"/>
               </a:ext>
             </a:extLst>
           </p:cNvPr>
@@ -541,7 +541,7 @@
           <a:bodyPr/>
           <a:lstStyle/>
           <a:p>
-            <a:fld id="{BC81F3A5-ECEF-4C17-B784-6332A8EA5E38}" type="slidenum">
+            <a:fld id="{EA8BC1D6-A548-4A62-A106-3BCC4D337BCD}" type="slidenum">
               <a:rPr kumimoji="1" lang="ja-JP" altLang="en-US" smtClean="0"/>
               <a:t>‹#›</a:t>
             </a:fld>
@@ -552,7 +552,7 @@
     </p:spTree>
     <p:extLst>
       <p:ext uri="{BB962C8B-B14F-4D97-AF65-F5344CB8AC3E}">
-        <p14:creationId xmlns:p14="http://schemas.microsoft.com/office/powerpoint/2010/main" val="4074591007"/>
+        <p14:creationId xmlns:p14="http://schemas.microsoft.com/office/powerpoint/2010/main" val="3459202891"/>
       </p:ext>
     </p:extLst>
   </p:cSld>
@@ -584,7 +584,7 @@
           <p:cNvPr id="2" name="縦書きタイトル 1">
             <a:extLst>
               <a:ext uri="{FF2B5EF4-FFF2-40B4-BE49-F238E27FC236}">
-                <a16:creationId xmlns:a16="http://schemas.microsoft.com/office/drawing/2014/main" id="{FFF32095-1D86-12BA-0B6F-EC5FF79EB2D8}"/>
+                <a16:creationId xmlns:a16="http://schemas.microsoft.com/office/drawing/2014/main" id="{FB95B564-690C-6596-E82B-2F2DA6E3F357}"/>
               </a:ext>
             </a:extLst>
           </p:cNvPr>
@@ -617,7 +617,7 @@
           <p:cNvPr id="3" name="縦書きテキスト プレースホルダー 2">
             <a:extLst>
               <a:ext uri="{FF2B5EF4-FFF2-40B4-BE49-F238E27FC236}">
-                <a16:creationId xmlns:a16="http://schemas.microsoft.com/office/drawing/2014/main" id="{33FE554D-CB87-6EF1-9703-DCEF804F3E50}"/>
+                <a16:creationId xmlns:a16="http://schemas.microsoft.com/office/drawing/2014/main" id="{D32C0B6C-E161-BCAB-1346-8CC6F7F44092}"/>
               </a:ext>
             </a:extLst>
           </p:cNvPr>
@@ -711,7 +711,7 @@
           <p:cNvPr id="4" name="日付プレースホルダー 3">
             <a:extLst>
               <a:ext uri="{FF2B5EF4-FFF2-40B4-BE49-F238E27FC236}">
-                <a16:creationId xmlns:a16="http://schemas.microsoft.com/office/drawing/2014/main" id="{9B23A9B4-57D8-4945-8847-54F783BB435A}"/>
+                <a16:creationId xmlns:a16="http://schemas.microsoft.com/office/drawing/2014/main" id="{DF3A4DB6-C11D-99F0-0A2B-0A1B3CECC77F}"/>
               </a:ext>
             </a:extLst>
           </p:cNvPr>
@@ -727,7 +727,7 @@
           <a:bodyPr/>
           <a:lstStyle/>
           <a:p>
-            <a:fld id="{29CD5C1E-DAEB-4845-87E9-F55D79C7ED6B}" type="datetimeFigureOut">
+            <a:fld id="{47C164C1-C361-41F3-8408-E012A298061A}" type="datetimeFigureOut">
               <a:rPr kumimoji="1" lang="ja-JP" altLang="en-US" smtClean="0"/>
               <a:t>2026/7/30</a:t>
             </a:fld>
@@ -740,7 +740,7 @@
           <p:cNvPr id="5" name="フッター プレースホルダー 4">
             <a:extLst>
               <a:ext uri="{FF2B5EF4-FFF2-40B4-BE49-F238E27FC236}">
-                <a16:creationId xmlns:a16="http://schemas.microsoft.com/office/drawing/2014/main" id="{40153797-E3A5-B3DC-F3BF-E7E0F60F42D8}"/>
+                <a16:creationId xmlns:a16="http://schemas.microsoft.com/office/drawing/2014/main" id="{9052931E-63F8-10DC-FA56-1941640916F0}"/>
               </a:ext>
             </a:extLst>
           </p:cNvPr>
@@ -765,7 +765,7 @@
           <p:cNvPr id="6" name="スライド番号プレースホルダー 5">
             <a:extLst>
               <a:ext uri="{FF2B5EF4-FFF2-40B4-BE49-F238E27FC236}">
-                <a16:creationId xmlns:a16="http://schemas.microsoft.com/office/drawing/2014/main" id="{41C4CF89-7955-E139-C4E5-A3E16126BC0E}"/>
+                <a16:creationId xmlns:a16="http://schemas.microsoft.com/office/drawing/2014/main" id="{C8294123-8578-275E-A02A-525F54945CB8}"/>
               </a:ext>
             </a:extLst>
           </p:cNvPr>
@@ -781,7 +781,7 @@
           <a:bodyPr/>
           <a:lstStyle/>
           <a:p>
-            <a:fld id="{BC81F3A5-ECEF-4C17-B784-6332A8EA5E38}" type="slidenum">
+            <a:fld id="{EA8BC1D6-A548-4A62-A106-3BCC4D337BCD}" type="slidenum">
               <a:rPr kumimoji="1" lang="ja-JP" altLang="en-US" smtClean="0"/>
               <a:t>‹#›</a:t>
             </a:fld>
@@ -792,7 +792,7 @@
     </p:spTree>
     <p:extLst>
       <p:ext uri="{BB962C8B-B14F-4D97-AF65-F5344CB8AC3E}">
-        <p14:creationId xmlns:p14="http://schemas.microsoft.com/office/powerpoint/2010/main" val="3136945739"/>
+        <p14:creationId xmlns:p14="http://schemas.microsoft.com/office/powerpoint/2010/main" val="487602519"/>
       </p:ext>
     </p:extLst>
   </p:cSld>
@@ -824,7 +824,7 @@
           <p:cNvPr id="2" name="タイトル 1">
             <a:extLst>
               <a:ext uri="{FF2B5EF4-FFF2-40B4-BE49-F238E27FC236}">
-                <a16:creationId xmlns:a16="http://schemas.microsoft.com/office/drawing/2014/main" id="{48968D76-FD5E-0AF9-295C-F16B0635666D}"/>
+                <a16:creationId xmlns:a16="http://schemas.microsoft.com/office/drawing/2014/main" id="{DF226D64-CC6C-C3A8-B96D-DD366561B833}"/>
               </a:ext>
             </a:extLst>
           </p:cNvPr>
@@ -852,7 +852,7 @@
           <p:cNvPr id="3" name="コンテンツ プレースホルダー 2">
             <a:extLst>
               <a:ext uri="{FF2B5EF4-FFF2-40B4-BE49-F238E27FC236}">
-                <a16:creationId xmlns:a16="http://schemas.microsoft.com/office/drawing/2014/main" id="{73ED602A-EE0D-C196-A086-5751D147378F}"/>
+                <a16:creationId xmlns:a16="http://schemas.microsoft.com/office/drawing/2014/main" id="{5B7E05E0-596B-949C-3700-153061A9A756}"/>
               </a:ext>
             </a:extLst>
           </p:cNvPr>
@@ -941,7 +941,7 @@
           <p:cNvPr id="4" name="日付プレースホルダー 3">
             <a:extLst>
               <a:ext uri="{FF2B5EF4-FFF2-40B4-BE49-F238E27FC236}">
-                <a16:creationId xmlns:a16="http://schemas.microsoft.com/office/drawing/2014/main" id="{E1FAAB04-0559-D162-8724-F822524C8C4B}"/>
+                <a16:creationId xmlns:a16="http://schemas.microsoft.com/office/drawing/2014/main" id="{BE093FF8-3D75-0316-E2D9-A7CE79C3A778}"/>
               </a:ext>
             </a:extLst>
           </p:cNvPr>
@@ -957,7 +957,7 @@
           <a:bodyPr/>
           <a:lstStyle/>
           <a:p>
-            <a:fld id="{29CD5C1E-DAEB-4845-87E9-F55D79C7ED6B}" type="datetimeFigureOut">
+            <a:fld id="{47C164C1-C361-41F3-8408-E012A298061A}" type="datetimeFigureOut">
               <a:rPr kumimoji="1" lang="ja-JP" altLang="en-US" smtClean="0"/>
               <a:t>2026/7/30</a:t>
             </a:fld>
@@ -970,7 +970,7 @@
           <p:cNvPr id="5" name="フッター プレースホルダー 4">
             <a:extLst>
               <a:ext uri="{FF2B5EF4-FFF2-40B4-BE49-F238E27FC236}">
-                <a16:creationId xmlns:a16="http://schemas.microsoft.com/office/drawing/2014/main" id="{F403DA67-D16A-0138-A1A7-6460FEC3235C}"/>
+                <a16:creationId xmlns:a16="http://schemas.microsoft.com/office/drawing/2014/main" id="{2C21E847-FAE1-B61E-28FA-B3D89A88B863}"/>
               </a:ext>
             </a:extLst>
           </p:cNvPr>
@@ -995,7 +995,7 @@
           <p:cNvPr id="6" name="スライド番号プレースホルダー 5">
             <a:extLst>
               <a:ext uri="{FF2B5EF4-FFF2-40B4-BE49-F238E27FC236}">
-                <a16:creationId xmlns:a16="http://schemas.microsoft.com/office/drawing/2014/main" id="{37B84A1B-798F-4832-DF6B-61BC1D236F74}"/>
+                <a16:creationId xmlns:a16="http://schemas.microsoft.com/office/drawing/2014/main" id="{8B0D36B9-E9C1-C07A-5191-535AC487F620}"/>
               </a:ext>
             </a:extLst>
           </p:cNvPr>
@@ -1011,7 +1011,7 @@
           <a:bodyPr/>
           <a:lstStyle/>
           <a:p>
-            <a:fld id="{BC81F3A5-ECEF-4C17-B784-6332A8EA5E38}" type="slidenum">
+            <a:fld id="{EA8BC1D6-A548-4A62-A106-3BCC4D337BCD}" type="slidenum">
               <a:rPr kumimoji="1" lang="ja-JP" altLang="en-US" smtClean="0"/>
               <a:t>‹#›</a:t>
             </a:fld>
@@ -1022,7 +1022,7 @@
     </p:spTree>
     <p:extLst>
       <p:ext uri="{BB962C8B-B14F-4D97-AF65-F5344CB8AC3E}">
-        <p14:creationId xmlns:p14="http://schemas.microsoft.com/office/powerpoint/2010/main" val="1904247124"/>
+        <p14:creationId xmlns:p14="http://schemas.microsoft.com/office/powerpoint/2010/main" val="1430680306"/>
       </p:ext>
     </p:extLst>
   </p:cSld>
@@ -1054,7 +1054,7 @@
           <p:cNvPr id="2" name="タイトル 1">
             <a:extLst>
               <a:ext uri="{FF2B5EF4-FFF2-40B4-BE49-F238E27FC236}">
-                <a16:creationId xmlns:a16="http://schemas.microsoft.com/office/drawing/2014/main" id="{CB452660-212B-FD01-76F7-53B355936EAC}"/>
+                <a16:creationId xmlns:a16="http://schemas.microsoft.com/office/drawing/2014/main" id="{C949FF62-767F-76CE-1F47-104E05EBF4EA}"/>
               </a:ext>
             </a:extLst>
           </p:cNvPr>
@@ -1091,7 +1091,7 @@
           <p:cNvPr id="3" name="テキスト プレースホルダー 2">
             <a:extLst>
               <a:ext uri="{FF2B5EF4-FFF2-40B4-BE49-F238E27FC236}">
-                <a16:creationId xmlns:a16="http://schemas.microsoft.com/office/drawing/2014/main" id="{EE1DEF30-F7A9-068E-2E09-57E354551DDD}"/>
+                <a16:creationId xmlns:a16="http://schemas.microsoft.com/office/drawing/2014/main" id="{755FB1B2-200E-0503-A944-007D029FF3DC}"/>
               </a:ext>
             </a:extLst>
           </p:cNvPr>
@@ -1216,7 +1216,7 @@
           <p:cNvPr id="4" name="日付プレースホルダー 3">
             <a:extLst>
               <a:ext uri="{FF2B5EF4-FFF2-40B4-BE49-F238E27FC236}">
-                <a16:creationId xmlns:a16="http://schemas.microsoft.com/office/drawing/2014/main" id="{0282F63F-3782-CCEE-5654-317831AA0414}"/>
+                <a16:creationId xmlns:a16="http://schemas.microsoft.com/office/drawing/2014/main" id="{D3490110-BC5A-B4FC-EF94-EA041256EF4A}"/>
               </a:ext>
             </a:extLst>
           </p:cNvPr>
@@ -1232,7 +1232,7 @@
           <a:bodyPr/>
           <a:lstStyle/>
           <a:p>
-            <a:fld id="{29CD5C1E-DAEB-4845-87E9-F55D79C7ED6B}" type="datetimeFigureOut">
+            <a:fld id="{47C164C1-C361-41F3-8408-E012A298061A}" type="datetimeFigureOut">
               <a:rPr kumimoji="1" lang="ja-JP" altLang="en-US" smtClean="0"/>
               <a:t>2026/7/30</a:t>
             </a:fld>
@@ -1245,7 +1245,7 @@
           <p:cNvPr id="5" name="フッター プレースホルダー 4">
             <a:extLst>
               <a:ext uri="{FF2B5EF4-FFF2-40B4-BE49-F238E27FC236}">
-                <a16:creationId xmlns:a16="http://schemas.microsoft.com/office/drawing/2014/main" id="{E7919AC7-5104-1E05-B58C-2DCC1FB8EF1F}"/>
+                <a16:creationId xmlns:a16="http://schemas.microsoft.com/office/drawing/2014/main" id="{A781CB50-D879-59AB-201B-0044A7DD22A2}"/>
               </a:ext>
             </a:extLst>
           </p:cNvPr>
@@ -1270,7 +1270,7 @@
           <p:cNvPr id="6" name="スライド番号プレースホルダー 5">
             <a:extLst>
               <a:ext uri="{FF2B5EF4-FFF2-40B4-BE49-F238E27FC236}">
-                <a16:creationId xmlns:a16="http://schemas.microsoft.com/office/drawing/2014/main" id="{ED6B6353-9986-42FA-5EC7-F47FD213E361}"/>
+                <a16:creationId xmlns:a16="http://schemas.microsoft.com/office/drawing/2014/main" id="{16EF7E93-3B7E-88B7-A403-F4834FD6060C}"/>
               </a:ext>
             </a:extLst>
           </p:cNvPr>
@@ -1286,7 +1286,7 @@
           <a:bodyPr/>
           <a:lstStyle/>
           <a:p>
-            <a:fld id="{BC81F3A5-ECEF-4C17-B784-6332A8EA5E38}" type="slidenum">
+            <a:fld id="{EA8BC1D6-A548-4A62-A106-3BCC4D337BCD}" type="slidenum">
               <a:rPr kumimoji="1" lang="ja-JP" altLang="en-US" smtClean="0"/>
               <a:t>‹#›</a:t>
             </a:fld>
@@ -1297,7 +1297,7 @@
     </p:spTree>
     <p:extLst>
       <p:ext uri="{BB962C8B-B14F-4D97-AF65-F5344CB8AC3E}">
-        <p14:creationId xmlns:p14="http://schemas.microsoft.com/office/powerpoint/2010/main" val="2885869032"/>
+        <p14:creationId xmlns:p14="http://schemas.microsoft.com/office/powerpoint/2010/main" val="1231810192"/>
       </p:ext>
     </p:extLst>
   </p:cSld>
@@ -1329,7 +1329,7 @@
           <p:cNvPr id="2" name="タイトル 1">
             <a:extLst>
               <a:ext uri="{FF2B5EF4-FFF2-40B4-BE49-F238E27FC236}">
-                <a16:creationId xmlns:a16="http://schemas.microsoft.com/office/drawing/2014/main" id="{95789694-2899-71AF-8151-92233DAF4D2C}"/>
+                <a16:creationId xmlns:a16="http://schemas.microsoft.com/office/drawing/2014/main" id="{F7C1850C-2547-1C79-47F3-C3FF0EA75849}"/>
               </a:ext>
             </a:extLst>
           </p:cNvPr>
@@ -1357,7 +1357,7 @@
           <p:cNvPr id="3" name="コンテンツ プレースホルダー 2">
             <a:extLst>
               <a:ext uri="{FF2B5EF4-FFF2-40B4-BE49-F238E27FC236}">
-                <a16:creationId xmlns:a16="http://schemas.microsoft.com/office/drawing/2014/main" id="{6E6D1746-1A9C-90ED-9B26-808D7E99AC68}"/>
+                <a16:creationId xmlns:a16="http://schemas.microsoft.com/office/drawing/2014/main" id="{C9FE7B65-B189-1FD0-29CE-9D46E723FA38}"/>
               </a:ext>
             </a:extLst>
           </p:cNvPr>
@@ -1451,7 +1451,7 @@
           <p:cNvPr id="4" name="コンテンツ プレースホルダー 3">
             <a:extLst>
               <a:ext uri="{FF2B5EF4-FFF2-40B4-BE49-F238E27FC236}">
-                <a16:creationId xmlns:a16="http://schemas.microsoft.com/office/drawing/2014/main" id="{86805D5C-7F53-9B8A-594A-CD09FB5C4723}"/>
+                <a16:creationId xmlns:a16="http://schemas.microsoft.com/office/drawing/2014/main" id="{D4ABE296-E087-B732-E7CF-FB2B65419863}"/>
               </a:ext>
             </a:extLst>
           </p:cNvPr>
@@ -1545,7 +1545,7 @@
           <p:cNvPr id="5" name="日付プレースホルダー 4">
             <a:extLst>
               <a:ext uri="{FF2B5EF4-FFF2-40B4-BE49-F238E27FC236}">
-                <a16:creationId xmlns:a16="http://schemas.microsoft.com/office/drawing/2014/main" id="{4FE7454B-77AE-D1BB-6299-7CF303B517BC}"/>
+                <a16:creationId xmlns:a16="http://schemas.microsoft.com/office/drawing/2014/main" id="{2A948A7D-2261-5359-FC85-5F8AF90626B7}"/>
               </a:ext>
             </a:extLst>
           </p:cNvPr>
@@ -1561,7 +1561,7 @@
           <a:bodyPr/>
           <a:lstStyle/>
           <a:p>
-            <a:fld id="{29CD5C1E-DAEB-4845-87E9-F55D79C7ED6B}" type="datetimeFigureOut">
+            <a:fld id="{47C164C1-C361-41F3-8408-E012A298061A}" type="datetimeFigureOut">
               <a:rPr kumimoji="1" lang="ja-JP" altLang="en-US" smtClean="0"/>
               <a:t>2026/7/30</a:t>
             </a:fld>
@@ -1574,7 +1574,7 @@
           <p:cNvPr id="6" name="フッター プレースホルダー 5">
             <a:extLst>
               <a:ext uri="{FF2B5EF4-FFF2-40B4-BE49-F238E27FC236}">
-                <a16:creationId xmlns:a16="http://schemas.microsoft.com/office/drawing/2014/main" id="{5BC8EDB3-E1C2-F462-39E7-61DFDDA9F2B8}"/>
+                <a16:creationId xmlns:a16="http://schemas.microsoft.com/office/drawing/2014/main" id="{CE3C37FC-142A-3606-E828-A83D747CF8A2}"/>
               </a:ext>
             </a:extLst>
           </p:cNvPr>
@@ -1599,7 +1599,7 @@
           <p:cNvPr id="7" name="スライド番号プレースホルダー 6">
             <a:extLst>
               <a:ext uri="{FF2B5EF4-FFF2-40B4-BE49-F238E27FC236}">
-                <a16:creationId xmlns:a16="http://schemas.microsoft.com/office/drawing/2014/main" id="{681CFD7F-3AA0-669A-76CA-2376F53BF52B}"/>
+                <a16:creationId xmlns:a16="http://schemas.microsoft.com/office/drawing/2014/main" id="{BAEA8891-9FD5-E2AC-B924-7479BDC1DB9E}"/>
               </a:ext>
             </a:extLst>
           </p:cNvPr>
@@ -1615,7 +1615,7 @@
           <a:bodyPr/>
           <a:lstStyle/>
           <a:p>
-            <a:fld id="{BC81F3A5-ECEF-4C17-B784-6332A8EA5E38}" type="slidenum">
+            <a:fld id="{EA8BC1D6-A548-4A62-A106-3BCC4D337BCD}" type="slidenum">
               <a:rPr kumimoji="1" lang="ja-JP" altLang="en-US" smtClean="0"/>
               <a:t>‹#›</a:t>
             </a:fld>
@@ -1626,7 +1626,7 @@
     </p:spTree>
     <p:extLst>
       <p:ext uri="{BB962C8B-B14F-4D97-AF65-F5344CB8AC3E}">
-        <p14:creationId xmlns:p14="http://schemas.microsoft.com/office/powerpoint/2010/main" val="2797080896"/>
+        <p14:creationId xmlns:p14="http://schemas.microsoft.com/office/powerpoint/2010/main" val="855745326"/>
       </p:ext>
     </p:extLst>
   </p:cSld>
@@ -1658,7 +1658,7 @@
           <p:cNvPr id="2" name="タイトル 1">
             <a:extLst>
               <a:ext uri="{FF2B5EF4-FFF2-40B4-BE49-F238E27FC236}">
-                <a16:creationId xmlns:a16="http://schemas.microsoft.com/office/drawing/2014/main" id="{38BFDE7C-ECF3-DF10-0D1B-6B6622A9EE1D}"/>
+                <a16:creationId xmlns:a16="http://schemas.microsoft.com/office/drawing/2014/main" id="{57F0246C-8BA1-0BB1-4667-68AE9DBE7610}"/>
               </a:ext>
             </a:extLst>
           </p:cNvPr>
@@ -1691,7 +1691,7 @@
           <p:cNvPr id="3" name="テキスト プレースホルダー 2">
             <a:extLst>
               <a:ext uri="{FF2B5EF4-FFF2-40B4-BE49-F238E27FC236}">
-                <a16:creationId xmlns:a16="http://schemas.microsoft.com/office/drawing/2014/main" id="{E96F7D63-395A-FC85-A62E-93D1BBA915D0}"/>
+                <a16:creationId xmlns:a16="http://schemas.microsoft.com/office/drawing/2014/main" id="{02C09C79-AD87-CD8A-4698-AAA023E0A98C}"/>
               </a:ext>
             </a:extLst>
           </p:cNvPr>
@@ -1762,7 +1762,7 @@
           <p:cNvPr id="4" name="コンテンツ プレースホルダー 3">
             <a:extLst>
               <a:ext uri="{FF2B5EF4-FFF2-40B4-BE49-F238E27FC236}">
-                <a16:creationId xmlns:a16="http://schemas.microsoft.com/office/drawing/2014/main" id="{1B6BD4FC-8561-8AE7-A4FB-F9336ECD7C4A}"/>
+                <a16:creationId xmlns:a16="http://schemas.microsoft.com/office/drawing/2014/main" id="{1FE4825C-7554-77EB-E489-0E8B74425C92}"/>
               </a:ext>
             </a:extLst>
           </p:cNvPr>
@@ -1856,7 +1856,7 @@
           <p:cNvPr id="5" name="テキスト プレースホルダー 4">
             <a:extLst>
               <a:ext uri="{FF2B5EF4-FFF2-40B4-BE49-F238E27FC236}">
-                <a16:creationId xmlns:a16="http://schemas.microsoft.com/office/drawing/2014/main" id="{1E56578A-0EA8-75AB-689E-9037B4E8E30F}"/>
+                <a16:creationId xmlns:a16="http://schemas.microsoft.com/office/drawing/2014/main" id="{B831ED2A-5962-3A78-A53E-1162396CC6F9}"/>
               </a:ext>
             </a:extLst>
           </p:cNvPr>
@@ -1927,7 +1927,7 @@
           <p:cNvPr id="6" name="コンテンツ プレースホルダー 5">
             <a:extLst>
               <a:ext uri="{FF2B5EF4-FFF2-40B4-BE49-F238E27FC236}">
-                <a16:creationId xmlns:a16="http://schemas.microsoft.com/office/drawing/2014/main" id="{A795FF79-635D-1BC8-58B6-E73DA6C2C337}"/>
+                <a16:creationId xmlns:a16="http://schemas.microsoft.com/office/drawing/2014/main" id="{F9F04CF7-DB16-AD7B-59ED-19EDED3197B2}"/>
               </a:ext>
             </a:extLst>
           </p:cNvPr>
@@ -2021,7 +2021,7 @@
           <p:cNvPr id="7" name="日付プレースホルダー 6">
             <a:extLst>
               <a:ext uri="{FF2B5EF4-FFF2-40B4-BE49-F238E27FC236}">
-                <a16:creationId xmlns:a16="http://schemas.microsoft.com/office/drawing/2014/main" id="{04FFF72E-3CA4-74CC-EA5D-0F6658FFB072}"/>
+                <a16:creationId xmlns:a16="http://schemas.microsoft.com/office/drawing/2014/main" id="{D1DCDD96-0EF6-7DEE-9A6E-0C4ED1E13D85}"/>
               </a:ext>
             </a:extLst>
           </p:cNvPr>
@@ -2037,7 +2037,7 @@
           <a:bodyPr/>
           <a:lstStyle/>
           <a:p>
-            <a:fld id="{29CD5C1E-DAEB-4845-87E9-F55D79C7ED6B}" type="datetimeFigureOut">
+            <a:fld id="{47C164C1-C361-41F3-8408-E012A298061A}" type="datetimeFigureOut">
               <a:rPr kumimoji="1" lang="ja-JP" altLang="en-US" smtClean="0"/>
               <a:t>2026/7/30</a:t>
             </a:fld>
@@ -2050,7 +2050,7 @@
           <p:cNvPr id="8" name="フッター プレースホルダー 7">
             <a:extLst>
               <a:ext uri="{FF2B5EF4-FFF2-40B4-BE49-F238E27FC236}">
-                <a16:creationId xmlns:a16="http://schemas.microsoft.com/office/drawing/2014/main" id="{02F43B72-D2DA-64C9-C667-FB6C2BC8793E}"/>
+                <a16:creationId xmlns:a16="http://schemas.microsoft.com/office/drawing/2014/main" id="{26FF6644-4AB5-D3B1-C754-1F93ED2E9F26}"/>
               </a:ext>
             </a:extLst>
           </p:cNvPr>
@@ -2075,7 +2075,7 @@
           <p:cNvPr id="9" name="スライド番号プレースホルダー 8">
             <a:extLst>
               <a:ext uri="{FF2B5EF4-FFF2-40B4-BE49-F238E27FC236}">
-                <a16:creationId xmlns:a16="http://schemas.microsoft.com/office/drawing/2014/main" id="{86CFCD3A-9CBB-E018-C414-B6FC11C6CC3C}"/>
+                <a16:creationId xmlns:a16="http://schemas.microsoft.com/office/drawing/2014/main" id="{EEDB1667-BC4C-F3AA-D97A-B11239254008}"/>
               </a:ext>
             </a:extLst>
           </p:cNvPr>
@@ -2091,7 +2091,7 @@
           <a:bodyPr/>
           <a:lstStyle/>
           <a:p>
-            <a:fld id="{BC81F3A5-ECEF-4C17-B784-6332A8EA5E38}" type="slidenum">
+            <a:fld id="{EA8BC1D6-A548-4A62-A106-3BCC4D337BCD}" type="slidenum">
               <a:rPr kumimoji="1" lang="ja-JP" altLang="en-US" smtClean="0"/>
               <a:t>‹#›</a:t>
             </a:fld>
@@ -2102,7 +2102,7 @@
     </p:spTree>
     <p:extLst>
       <p:ext uri="{BB962C8B-B14F-4D97-AF65-F5344CB8AC3E}">
-        <p14:creationId xmlns:p14="http://schemas.microsoft.com/office/powerpoint/2010/main" val="2502079060"/>
+        <p14:creationId xmlns:p14="http://schemas.microsoft.com/office/powerpoint/2010/main" val="3608300051"/>
       </p:ext>
     </p:extLst>
   </p:cSld>
@@ -2134,7 +2134,7 @@
           <p:cNvPr id="2" name="タイトル 1">
             <a:extLst>
               <a:ext uri="{FF2B5EF4-FFF2-40B4-BE49-F238E27FC236}">
-                <a16:creationId xmlns:a16="http://schemas.microsoft.com/office/drawing/2014/main" id="{0677E901-08E7-206A-E0EF-B2FB9C266A60}"/>
+                <a16:creationId xmlns:a16="http://schemas.microsoft.com/office/drawing/2014/main" id="{220640B5-A4FC-4ABC-B48F-02587771E291}"/>
               </a:ext>
             </a:extLst>
           </p:cNvPr>
@@ -2162,7 +2162,7 @@
           <p:cNvPr id="3" name="日付プレースホルダー 2">
             <a:extLst>
               <a:ext uri="{FF2B5EF4-FFF2-40B4-BE49-F238E27FC236}">
-                <a16:creationId xmlns:a16="http://schemas.microsoft.com/office/drawing/2014/main" id="{8B5BECBA-65B4-C885-7553-E8D786DF42EF}"/>
+                <a16:creationId xmlns:a16="http://schemas.microsoft.com/office/drawing/2014/main" id="{D254A2B0-0497-DD5D-E372-E509751D33F1}"/>
               </a:ext>
             </a:extLst>
           </p:cNvPr>
@@ -2178,7 +2178,7 @@
           <a:bodyPr/>
           <a:lstStyle/>
           <a:p>
-            <a:fld id="{29CD5C1E-DAEB-4845-87E9-F55D79C7ED6B}" type="datetimeFigureOut">
+            <a:fld id="{47C164C1-C361-41F3-8408-E012A298061A}" type="datetimeFigureOut">
               <a:rPr kumimoji="1" lang="ja-JP" altLang="en-US" smtClean="0"/>
               <a:t>2026/7/30</a:t>
             </a:fld>
@@ -2191,7 +2191,7 @@
           <p:cNvPr id="4" name="フッター プレースホルダー 3">
             <a:extLst>
               <a:ext uri="{FF2B5EF4-FFF2-40B4-BE49-F238E27FC236}">
-                <a16:creationId xmlns:a16="http://schemas.microsoft.com/office/drawing/2014/main" id="{7A22490D-CE0F-7876-2775-8ED8E55325CC}"/>
+                <a16:creationId xmlns:a16="http://schemas.microsoft.com/office/drawing/2014/main" id="{92EE6C71-E9D8-2B9D-AE54-3DE71228C200}"/>
               </a:ext>
             </a:extLst>
           </p:cNvPr>
@@ -2216,7 +2216,7 @@
           <p:cNvPr id="5" name="スライド番号プレースホルダー 4">
             <a:extLst>
               <a:ext uri="{FF2B5EF4-FFF2-40B4-BE49-F238E27FC236}">
-                <a16:creationId xmlns:a16="http://schemas.microsoft.com/office/drawing/2014/main" id="{6A25DF7C-14C4-5E04-2FA5-DA1B58942CC1}"/>
+                <a16:creationId xmlns:a16="http://schemas.microsoft.com/office/drawing/2014/main" id="{996DBE80-A2DD-C66A-9441-04F74602E78D}"/>
               </a:ext>
             </a:extLst>
           </p:cNvPr>
@@ -2232,7 +2232,7 @@
           <a:bodyPr/>
           <a:lstStyle/>
           <a:p>
-            <a:fld id="{BC81F3A5-ECEF-4C17-B784-6332A8EA5E38}" type="slidenum">
+            <a:fld id="{EA8BC1D6-A548-4A62-A106-3BCC4D337BCD}" type="slidenum">
               <a:rPr kumimoji="1" lang="ja-JP" altLang="en-US" smtClean="0"/>
               <a:t>‹#›</a:t>
             </a:fld>
@@ -2243,7 +2243,7 @@
     </p:spTree>
     <p:extLst>
       <p:ext uri="{BB962C8B-B14F-4D97-AF65-F5344CB8AC3E}">
-        <p14:creationId xmlns:p14="http://schemas.microsoft.com/office/powerpoint/2010/main" val="335864220"/>
+        <p14:creationId xmlns:p14="http://schemas.microsoft.com/office/powerpoint/2010/main" val="768362451"/>
       </p:ext>
     </p:extLst>
   </p:cSld>
@@ -2275,7 +2275,7 @@
           <p:cNvPr id="2" name="日付プレースホルダー 1">
             <a:extLst>
               <a:ext uri="{FF2B5EF4-FFF2-40B4-BE49-F238E27FC236}">
-                <a16:creationId xmlns:a16="http://schemas.microsoft.com/office/drawing/2014/main" id="{B870A4F6-7D9E-D03E-344C-8259700066FD}"/>
+                <a16:creationId xmlns:a16="http://schemas.microsoft.com/office/drawing/2014/main" id="{67DFE859-7F02-2131-42AA-CE2E478AB0F8}"/>
               </a:ext>
             </a:extLst>
           </p:cNvPr>
@@ -2291,7 +2291,7 @@
           <a:bodyPr/>
           <a:lstStyle/>
           <a:p>
-            <a:fld id="{29CD5C1E-DAEB-4845-87E9-F55D79C7ED6B}" type="datetimeFigureOut">
+            <a:fld id="{47C164C1-C361-41F3-8408-E012A298061A}" type="datetimeFigureOut">
               <a:rPr kumimoji="1" lang="ja-JP" altLang="en-US" smtClean="0"/>
               <a:t>2026/7/30</a:t>
             </a:fld>
@@ -2304,7 +2304,7 @@
           <p:cNvPr id="3" name="フッター プレースホルダー 2">
             <a:extLst>
               <a:ext uri="{FF2B5EF4-FFF2-40B4-BE49-F238E27FC236}">
-                <a16:creationId xmlns:a16="http://schemas.microsoft.com/office/drawing/2014/main" id="{BC5F7D58-7D16-6254-9D9D-3038A578CE1C}"/>
+                <a16:creationId xmlns:a16="http://schemas.microsoft.com/office/drawing/2014/main" id="{4A978B4D-2F9B-DE3E-45A2-5AF79181D9D1}"/>
               </a:ext>
             </a:extLst>
           </p:cNvPr>
@@ -2329,7 +2329,7 @@
           <p:cNvPr id="4" name="スライド番号プレースホルダー 3">
             <a:extLst>
               <a:ext uri="{FF2B5EF4-FFF2-40B4-BE49-F238E27FC236}">
-                <a16:creationId xmlns:a16="http://schemas.microsoft.com/office/drawing/2014/main" id="{477C8ED7-89DC-E642-7FBE-9717E353DEC4}"/>
+                <a16:creationId xmlns:a16="http://schemas.microsoft.com/office/drawing/2014/main" id="{6A6B38E3-C8DE-76C0-3BC6-F91AC46D0CA2}"/>
               </a:ext>
             </a:extLst>
           </p:cNvPr>
@@ -2345,7 +2345,7 @@
           <a:bodyPr/>
           <a:lstStyle/>
           <a:p>
-            <a:fld id="{BC81F3A5-ECEF-4C17-B784-6332A8EA5E38}" type="slidenum">
+            <a:fld id="{EA8BC1D6-A548-4A62-A106-3BCC4D337BCD}" type="slidenum">
               <a:rPr kumimoji="1" lang="ja-JP" altLang="en-US" smtClean="0"/>
               <a:t>‹#›</a:t>
             </a:fld>
@@ -2356,7 +2356,7 @@
     </p:spTree>
     <p:extLst>
       <p:ext uri="{BB962C8B-B14F-4D97-AF65-F5344CB8AC3E}">
-        <p14:creationId xmlns:p14="http://schemas.microsoft.com/office/powerpoint/2010/main" val="3714330979"/>
+        <p14:creationId xmlns:p14="http://schemas.microsoft.com/office/powerpoint/2010/main" val="1049609761"/>
       </p:ext>
     </p:extLst>
   </p:cSld>
@@ -2388,7 +2388,7 @@
           <p:cNvPr id="2" name="タイトル 1">
             <a:extLst>
               <a:ext uri="{FF2B5EF4-FFF2-40B4-BE49-F238E27FC236}">
-                <a16:creationId xmlns:a16="http://schemas.microsoft.com/office/drawing/2014/main" id="{D4A8A634-E47C-F8CA-1B14-4717CAAB1147}"/>
+                <a16:creationId xmlns:a16="http://schemas.microsoft.com/office/drawing/2014/main" id="{624D3B67-F5D7-4716-E4DF-B9426C921869}"/>
               </a:ext>
             </a:extLst>
           </p:cNvPr>
@@ -2425,7 +2425,7 @@
           <p:cNvPr id="3" name="コンテンツ プレースホルダー 2">
             <a:extLst>
               <a:ext uri="{FF2B5EF4-FFF2-40B4-BE49-F238E27FC236}">
-                <a16:creationId xmlns:a16="http://schemas.microsoft.com/office/drawing/2014/main" id="{F5A37674-7518-5518-05B8-DBD9318A2625}"/>
+                <a16:creationId xmlns:a16="http://schemas.microsoft.com/office/drawing/2014/main" id="{A33FA83B-EB60-7B7F-F20F-263B1541E806}"/>
               </a:ext>
             </a:extLst>
           </p:cNvPr>
@@ -2547,7 +2547,7 @@
           <p:cNvPr id="4" name="テキスト プレースホルダー 3">
             <a:extLst>
               <a:ext uri="{FF2B5EF4-FFF2-40B4-BE49-F238E27FC236}">
-                <a16:creationId xmlns:a16="http://schemas.microsoft.com/office/drawing/2014/main" id="{DB2C75CE-FC8A-E09A-9104-5C4FE5B8723C}"/>
+                <a16:creationId xmlns:a16="http://schemas.microsoft.com/office/drawing/2014/main" id="{0ED902EA-E9E7-4A14-B6AA-B2D8CC0535A7}"/>
               </a:ext>
             </a:extLst>
           </p:cNvPr>
@@ -2618,7 +2618,7 @@
           <p:cNvPr id="5" name="日付プレースホルダー 4">
             <a:extLst>
               <a:ext uri="{FF2B5EF4-FFF2-40B4-BE49-F238E27FC236}">
-                <a16:creationId xmlns:a16="http://schemas.microsoft.com/office/drawing/2014/main" id="{043E7FED-0F1E-61B5-6309-DF14C8B1F9C7}"/>
+                <a16:creationId xmlns:a16="http://schemas.microsoft.com/office/drawing/2014/main" id="{52D0F3BD-C98E-FC9A-BFF7-9A0E26AFF6FD}"/>
               </a:ext>
             </a:extLst>
           </p:cNvPr>
@@ -2634,7 +2634,7 @@
           <a:bodyPr/>
           <a:lstStyle/>
           <a:p>
-            <a:fld id="{29CD5C1E-DAEB-4845-87E9-F55D79C7ED6B}" type="datetimeFigureOut">
+            <a:fld id="{47C164C1-C361-41F3-8408-E012A298061A}" type="datetimeFigureOut">
               <a:rPr kumimoji="1" lang="ja-JP" altLang="en-US" smtClean="0"/>
               <a:t>2026/7/30</a:t>
             </a:fld>
@@ -2647,7 +2647,7 @@
           <p:cNvPr id="6" name="フッター プレースホルダー 5">
             <a:extLst>
               <a:ext uri="{FF2B5EF4-FFF2-40B4-BE49-F238E27FC236}">
-                <a16:creationId xmlns:a16="http://schemas.microsoft.com/office/drawing/2014/main" id="{5F6C7398-1FEA-0BAE-D65F-3EB3CC176920}"/>
+                <a16:creationId xmlns:a16="http://schemas.microsoft.com/office/drawing/2014/main" id="{3C62CDAD-7B28-355C-9D85-A1D247B29B76}"/>
               </a:ext>
             </a:extLst>
           </p:cNvPr>
@@ -2672,7 +2672,7 @@
           <p:cNvPr id="7" name="スライド番号プレースホルダー 6">
             <a:extLst>
               <a:ext uri="{FF2B5EF4-FFF2-40B4-BE49-F238E27FC236}">
-                <a16:creationId xmlns:a16="http://schemas.microsoft.com/office/drawing/2014/main" id="{4B54677B-8E7E-A4EC-EE28-9C83D6BADF8C}"/>
+                <a16:creationId xmlns:a16="http://schemas.microsoft.com/office/drawing/2014/main" id="{90ED95B1-7F69-13E5-3C3B-D4FA8AA16E37}"/>
               </a:ext>
             </a:extLst>
           </p:cNvPr>
@@ -2688,7 +2688,7 @@
           <a:bodyPr/>
           <a:lstStyle/>
           <a:p>
-            <a:fld id="{BC81F3A5-ECEF-4C17-B784-6332A8EA5E38}" type="slidenum">
+            <a:fld id="{EA8BC1D6-A548-4A62-A106-3BCC4D337BCD}" type="slidenum">
               <a:rPr kumimoji="1" lang="ja-JP" altLang="en-US" smtClean="0"/>
               <a:t>‹#›</a:t>
             </a:fld>
@@ -2699,7 +2699,7 @@
     </p:spTree>
     <p:extLst>
       <p:ext uri="{BB962C8B-B14F-4D97-AF65-F5344CB8AC3E}">
-        <p14:creationId xmlns:p14="http://schemas.microsoft.com/office/powerpoint/2010/main" val="2824975515"/>
+        <p14:creationId xmlns:p14="http://schemas.microsoft.com/office/powerpoint/2010/main" val="3390200499"/>
       </p:ext>
     </p:extLst>
   </p:cSld>
@@ -2731,7 +2731,7 @@
           <p:cNvPr id="2" name="タイトル 1">
             <a:extLst>
               <a:ext uri="{FF2B5EF4-FFF2-40B4-BE49-F238E27FC236}">
-                <a16:creationId xmlns:a16="http://schemas.microsoft.com/office/drawing/2014/main" id="{608A9AEE-863A-5D65-E353-6DF66A42ADCA}"/>
+                <a16:creationId xmlns:a16="http://schemas.microsoft.com/office/drawing/2014/main" id="{B5750D9E-4198-F66D-35C4-9631B2EFB9F8}"/>
               </a:ext>
             </a:extLst>
           </p:cNvPr>
@@ -2768,7 +2768,7 @@
           <p:cNvPr id="3" name="図プレースホルダー 2">
             <a:extLst>
               <a:ext uri="{FF2B5EF4-FFF2-40B4-BE49-F238E27FC236}">
-                <a16:creationId xmlns:a16="http://schemas.microsoft.com/office/drawing/2014/main" id="{1F18507D-7C76-2C32-69F4-C3EFA4986C37}"/>
+                <a16:creationId xmlns:a16="http://schemas.microsoft.com/office/drawing/2014/main" id="{8A2594A9-99FD-8BF2-B1EE-2F3E452956F3}"/>
               </a:ext>
             </a:extLst>
           </p:cNvPr>
@@ -2835,7 +2835,7 @@
           <p:cNvPr id="4" name="テキスト プレースホルダー 3">
             <a:extLst>
               <a:ext uri="{FF2B5EF4-FFF2-40B4-BE49-F238E27FC236}">
-                <a16:creationId xmlns:a16="http://schemas.microsoft.com/office/drawing/2014/main" id="{11D6F443-3DA3-2F03-D37F-1C3EB36AB08C}"/>
+                <a16:creationId xmlns:a16="http://schemas.microsoft.com/office/drawing/2014/main" id="{3D5E98F1-E7F4-A868-11DC-FDA17B67F0D5}"/>
               </a:ext>
             </a:extLst>
           </p:cNvPr>
@@ -2906,7 +2906,7 @@
           <p:cNvPr id="5" name="日付プレースホルダー 4">
             <a:extLst>
               <a:ext uri="{FF2B5EF4-FFF2-40B4-BE49-F238E27FC236}">
-                <a16:creationId xmlns:a16="http://schemas.microsoft.com/office/drawing/2014/main" id="{602B6128-CCF9-C171-39C2-4D0ADD9B6B18}"/>
+                <a16:creationId xmlns:a16="http://schemas.microsoft.com/office/drawing/2014/main" id="{566C179D-76D0-ACBB-DD11-6F51AFFBFB58}"/>
               </a:ext>
             </a:extLst>
           </p:cNvPr>
@@ -2922,7 +2922,7 @@
           <a:bodyPr/>
           <a:lstStyle/>
           <a:p>
-            <a:fld id="{29CD5C1E-DAEB-4845-87E9-F55D79C7ED6B}" type="datetimeFigureOut">
+            <a:fld id="{47C164C1-C361-41F3-8408-E012A298061A}" type="datetimeFigureOut">
               <a:rPr kumimoji="1" lang="ja-JP" altLang="en-US" smtClean="0"/>
               <a:t>2026/7/30</a:t>
             </a:fld>
@@ -2935,7 +2935,7 @@
           <p:cNvPr id="6" name="フッター プレースホルダー 5">
             <a:extLst>
               <a:ext uri="{FF2B5EF4-FFF2-40B4-BE49-F238E27FC236}">
-                <a16:creationId xmlns:a16="http://schemas.microsoft.com/office/drawing/2014/main" id="{DF33F7E9-855C-AB59-48E2-D96905FCED97}"/>
+                <a16:creationId xmlns:a16="http://schemas.microsoft.com/office/drawing/2014/main" id="{C88F7B5F-769C-B9E6-EFBF-7F0C576D413C}"/>
               </a:ext>
             </a:extLst>
           </p:cNvPr>
@@ -2960,7 +2960,7 @@
           <p:cNvPr id="7" name="スライド番号プレースホルダー 6">
             <a:extLst>
               <a:ext uri="{FF2B5EF4-FFF2-40B4-BE49-F238E27FC236}">
-                <a16:creationId xmlns:a16="http://schemas.microsoft.com/office/drawing/2014/main" id="{9DAAC784-ED9F-1315-37BC-B5C7565ED5B5}"/>
+                <a16:creationId xmlns:a16="http://schemas.microsoft.com/office/drawing/2014/main" id="{4262AB66-F321-69D9-8E5E-AD2F11607BC1}"/>
               </a:ext>
             </a:extLst>
           </p:cNvPr>
@@ -2976,7 +2976,7 @@
           <a:bodyPr/>
           <a:lstStyle/>
           <a:p>
-            <a:fld id="{BC81F3A5-ECEF-4C17-B784-6332A8EA5E38}" type="slidenum">
+            <a:fld id="{EA8BC1D6-A548-4A62-A106-3BCC4D337BCD}" type="slidenum">
               <a:rPr kumimoji="1" lang="ja-JP" altLang="en-US" smtClean="0"/>
               <a:t>‹#›</a:t>
             </a:fld>
@@ -2987,7 +2987,7 @@
     </p:spTree>
     <p:extLst>
       <p:ext uri="{BB962C8B-B14F-4D97-AF65-F5344CB8AC3E}">
-        <p14:creationId xmlns:p14="http://schemas.microsoft.com/office/powerpoint/2010/main" val="2030371774"/>
+        <p14:creationId xmlns:p14="http://schemas.microsoft.com/office/powerpoint/2010/main" val="1712210448"/>
       </p:ext>
     </p:extLst>
   </p:cSld>
@@ -3024,7 +3024,7 @@
           <p:cNvPr id="2" name="タイトル プレースホルダー 1">
             <a:extLst>
               <a:ext uri="{FF2B5EF4-FFF2-40B4-BE49-F238E27FC236}">
-                <a16:creationId xmlns:a16="http://schemas.microsoft.com/office/drawing/2014/main" id="{2A8B0E04-C1FD-1D29-6436-552EB3D905E4}"/>
+                <a16:creationId xmlns:a16="http://schemas.microsoft.com/office/drawing/2014/main" id="{F4EA5CE4-1E6E-FF3A-7F0D-C1D84618FDC7}"/>
               </a:ext>
             </a:extLst>
           </p:cNvPr>
@@ -3062,7 +3062,7 @@
           <p:cNvPr id="3" name="テキスト プレースホルダー 2">
             <a:extLst>
               <a:ext uri="{FF2B5EF4-FFF2-40B4-BE49-F238E27FC236}">
-                <a16:creationId xmlns:a16="http://schemas.microsoft.com/office/drawing/2014/main" id="{332E5F6A-2783-6811-BECC-898D1103A7DE}"/>
+                <a16:creationId xmlns:a16="http://schemas.microsoft.com/office/drawing/2014/main" id="{68EF3D6B-A1AC-087B-E6CD-8E2B1E0C504E}"/>
               </a:ext>
             </a:extLst>
           </p:cNvPr>
@@ -3161,7 +3161,7 @@
           <p:cNvPr id="4" name="日付プレースホルダー 3">
             <a:extLst>
               <a:ext uri="{FF2B5EF4-FFF2-40B4-BE49-F238E27FC236}">
-                <a16:creationId xmlns:a16="http://schemas.microsoft.com/office/drawing/2014/main" id="{C927C8EE-0140-320B-17AA-7764EC1C13FD}"/>
+                <a16:creationId xmlns:a16="http://schemas.microsoft.com/office/drawing/2014/main" id="{49825FF2-7D94-252E-471D-61FF911BA78A}"/>
               </a:ext>
             </a:extLst>
           </p:cNvPr>
@@ -3195,7 +3195,7 @@
             </a:lvl1pPr>
           </a:lstStyle>
           <a:p>
-            <a:fld id="{29CD5C1E-DAEB-4845-87E9-F55D79C7ED6B}" type="datetimeFigureOut">
+            <a:fld id="{47C164C1-C361-41F3-8408-E012A298061A}" type="datetimeFigureOut">
               <a:rPr kumimoji="1" lang="ja-JP" altLang="en-US" smtClean="0"/>
               <a:t>2026/7/30</a:t>
             </a:fld>
@@ -3208,7 +3208,7 @@
           <p:cNvPr id="5" name="フッター プレースホルダー 4">
             <a:extLst>
               <a:ext uri="{FF2B5EF4-FFF2-40B4-BE49-F238E27FC236}">
-                <a16:creationId xmlns:a16="http://schemas.microsoft.com/office/drawing/2014/main" id="{A2F2CBAB-5A50-92D9-B936-D0EA7D88ACA0}"/>
+                <a16:creationId xmlns:a16="http://schemas.microsoft.com/office/drawing/2014/main" id="{1E30F22D-E9D5-B6EF-D678-F251E46667CA}"/>
               </a:ext>
             </a:extLst>
           </p:cNvPr>
@@ -3251,7 +3251,7 @@
           <p:cNvPr id="6" name="スライド番号プレースホルダー 5">
             <a:extLst>
               <a:ext uri="{FF2B5EF4-FFF2-40B4-BE49-F238E27FC236}">
-                <a16:creationId xmlns:a16="http://schemas.microsoft.com/office/drawing/2014/main" id="{0FC37FDB-5139-2107-4A9C-48D613D74207}"/>
+                <a16:creationId xmlns:a16="http://schemas.microsoft.com/office/drawing/2014/main" id="{B0BBF052-0E82-AF95-5B2B-5043B654130B}"/>
               </a:ext>
             </a:extLst>
           </p:cNvPr>
@@ -3285,7 +3285,7 @@
             </a:lvl1pPr>
           </a:lstStyle>
           <a:p>
-            <a:fld id="{BC81F3A5-ECEF-4C17-B784-6332A8EA5E38}" type="slidenum">
+            <a:fld id="{EA8BC1D6-A548-4A62-A106-3BCC4D337BCD}" type="slidenum">
               <a:rPr kumimoji="1" lang="ja-JP" altLang="en-US" smtClean="0"/>
               <a:t>‹#›</a:t>
             </a:fld>
@@ -3296,7 +3296,7 @@
     </p:spTree>
     <p:extLst>
       <p:ext uri="{BB962C8B-B14F-4D97-AF65-F5344CB8AC3E}">
-        <p14:creationId xmlns:p14="http://schemas.microsoft.com/office/powerpoint/2010/main" val="75945484"/>
+        <p14:creationId xmlns:p14="http://schemas.microsoft.com/office/powerpoint/2010/main" val="289489277"/>
       </p:ext>
     </p:extLst>
   </p:cSld>
@@ -3619,7 +3619,7 @@
           <p:cNvPr id="2" name="テキスト ボックス 1">
             <a:extLst>
               <a:ext uri="{FF2B5EF4-FFF2-40B4-BE49-F238E27FC236}">
-                <a16:creationId xmlns:a16="http://schemas.microsoft.com/office/drawing/2014/main" id="{CF5A07BC-8DBB-A4A4-B1BE-D862A50ED465}"/>
+                <a16:creationId xmlns:a16="http://schemas.microsoft.com/office/drawing/2014/main" id="{3A36B50D-603E-6275-6112-2DAC99D3EFF8}"/>
               </a:ext>
             </a:extLst>
           </p:cNvPr>
@@ -3665,7 +3665,7 @@
           <p:cNvPr id="3" name="テキスト ボックス 2">
             <a:extLst>
               <a:ext uri="{FF2B5EF4-FFF2-40B4-BE49-F238E27FC236}">
-                <a16:creationId xmlns:a16="http://schemas.microsoft.com/office/drawing/2014/main" id="{F0A2868F-4B27-92CD-82C4-9887AE7478F1}"/>
+                <a16:creationId xmlns:a16="http://schemas.microsoft.com/office/drawing/2014/main" id="{A5AEFD37-F808-E4EB-D8B0-B9699A3CFF98}"/>
               </a:ext>
             </a:extLst>
           </p:cNvPr>
@@ -3695,14 +3695,17 @@
                 </a:solidFill>
                 <a:latin typeface="Arial" panose="020B0604020202020204" pitchFamily="34" charset="0"/>
               </a:rPr>
-              <a:t>local-service-finder TECH EXPLANATION</a:t>
-            </a:r>
-            <a:endParaRPr kumimoji="1" lang="ja-JP" altLang="en-US" sz="3400" b="1">
-              <a:solidFill>
-                <a:srgbClr val="111111"/>
-              </a:solidFill>
-              <a:latin typeface="Arial" panose="020B0604020202020204" pitchFamily="34" charset="0"/>
-            </a:endParaRPr>
+              <a:t>Local Service Finder</a:t>
+            </a:r>
+            <a:r>
+              <a:rPr kumimoji="1" lang="ja-JP" altLang="en-US" sz="3400" b="1">
+                <a:solidFill>
+                  <a:srgbClr val="111111"/>
+                </a:solidFill>
+                <a:latin typeface="Arial" panose="020B0604020202020204" pitchFamily="34" charset="0"/>
+              </a:rPr>
+              <a:t>の技術解説</a:t>
+            </a:r>
           </a:p>
         </p:txBody>
       </p:sp>
@@ -3711,7 +3714,7 @@
           <p:cNvPr id="4" name="テキスト ボックス 3">
             <a:extLst>
               <a:ext uri="{FF2B5EF4-FFF2-40B4-BE49-F238E27FC236}">
-                <a16:creationId xmlns:a16="http://schemas.microsoft.com/office/drawing/2014/main" id="{AF3C37AD-5096-07B5-4CD1-BC501AA47A2D}"/>
+                <a16:creationId xmlns:a16="http://schemas.microsoft.com/office/drawing/2014/main" id="{BF138C59-7902-CC40-996E-59B969D5256F}"/>
               </a:ext>
             </a:extLst>
           </p:cNvPr>
@@ -3735,20 +3738,14 @@
           <a:lstStyle/>
           <a:p>
             <a:r>
-              <a:rPr kumimoji="1" lang="en-US" altLang="ja-JP" sz="2000">
+              <a:rPr kumimoji="1" lang="ja-JP" altLang="en-US" sz="2000">
                 <a:solidFill>
                   <a:srgbClr val="333333"/>
                 </a:solidFill>
                 <a:latin typeface="Arial" panose="020B0604020202020204" pitchFamily="34" charset="0"/>
               </a:rPr>
-              <a:t>Architecture, implementation and commit history in 75 seconds</a:t>
-            </a:r>
-            <a:endParaRPr kumimoji="1" lang="ja-JP" altLang="en-US" sz="2000">
-              <a:solidFill>
-                <a:srgbClr val="333333"/>
-              </a:solidFill>
-              <a:latin typeface="Arial" panose="020B0604020202020204" pitchFamily="34" charset="0"/>
-            </a:endParaRPr>
+              <a:t>設計・実装・コミットから学ぶ短時間プレビュー</a:t>
+            </a:r>
           </a:p>
         </p:txBody>
       </p:sp>
@@ -3757,7 +3754,7 @@
           <p:cNvPr id="5" name="テキスト ボックス 4">
             <a:extLst>
               <a:ext uri="{FF2B5EF4-FFF2-40B4-BE49-F238E27FC236}">
-                <a16:creationId xmlns:a16="http://schemas.microsoft.com/office/drawing/2014/main" id="{D06554CA-9F3C-D7BD-5061-790746922D18}"/>
+                <a16:creationId xmlns:a16="http://schemas.microsoft.com/office/drawing/2014/main" id="{8D056817-F581-5AD0-E45B-E8E2571D372B}"/>
               </a:ext>
             </a:extLst>
           </p:cNvPr>
@@ -3804,7 +3801,7 @@
             <a:hlinkClick r:id="" action="ppaction://media"/>
             <a:extLst>
               <a:ext uri="{FF2B5EF4-FFF2-40B4-BE49-F238E27FC236}">
-                <a16:creationId xmlns:a16="http://schemas.microsoft.com/office/drawing/2014/main" id="{4981D541-D691-3792-A6B9-F686CFDCF2FF}"/>
+                <a16:creationId xmlns:a16="http://schemas.microsoft.com/office/drawing/2014/main" id="{9F3F6A4F-05A3-3E68-ADCF-8B4E672FB164}"/>
               </a:ext>
             </a:extLst>
           </p:cNvPr>
@@ -3839,7 +3836,7 @@
     </p:spTree>
     <p:extLst>
       <p:ext uri="{BB962C8B-B14F-4D97-AF65-F5344CB8AC3E}">
-        <p14:creationId xmlns:p14="http://schemas.microsoft.com/office/powerpoint/2010/main" val="1569442795"/>
+        <p14:creationId xmlns:p14="http://schemas.microsoft.com/office/powerpoint/2010/main" val="1715005607"/>
       </p:ext>
     </p:extLst>
   </p:cSld>
@@ -3963,7 +3960,7 @@
           <p:cNvPr id="2" name="テキスト ボックス 1">
             <a:extLst>
               <a:ext uri="{FF2B5EF4-FFF2-40B4-BE49-F238E27FC236}">
-                <a16:creationId xmlns:a16="http://schemas.microsoft.com/office/drawing/2014/main" id="{EF3D34BA-9AFC-E608-DCA1-89F4ED4AACE8}"/>
+                <a16:creationId xmlns:a16="http://schemas.microsoft.com/office/drawing/2014/main" id="{9D188DC2-71A0-8E81-3DBD-C960ADD5107E}"/>
               </a:ext>
             </a:extLst>
           </p:cNvPr>
@@ -4009,7 +4006,7 @@
           <p:cNvPr id="3" name="テキスト ボックス 2">
             <a:extLst>
               <a:ext uri="{FF2B5EF4-FFF2-40B4-BE49-F238E27FC236}">
-                <a16:creationId xmlns:a16="http://schemas.microsoft.com/office/drawing/2014/main" id="{FD7632B2-1555-FCC3-B7C0-2368BA180349}"/>
+                <a16:creationId xmlns:a16="http://schemas.microsoft.com/office/drawing/2014/main" id="{E60CF040-B647-8751-41FE-700134C9C8D7}"/>
               </a:ext>
             </a:extLst>
           </p:cNvPr>
@@ -4033,20 +4030,14 @@
           <a:lstStyle/>
           <a:p>
             <a:r>
-              <a:rPr kumimoji="1" lang="en-US" altLang="ja-JP" sz="3400" b="1">
+              <a:rPr kumimoji="1" lang="ja-JP" altLang="en-US" sz="3400" b="1">
                 <a:solidFill>
                   <a:srgbClr val="111111"/>
                 </a:solidFill>
                 <a:latin typeface="Arial" panose="020B0604020202020204" pitchFamily="34" charset="0"/>
               </a:rPr>
-              <a:t>WHAT DOES IT SOLVE?</a:t>
-            </a:r>
-            <a:endParaRPr kumimoji="1" lang="ja-JP" altLang="en-US" sz="3400" b="1">
-              <a:solidFill>
-                <a:srgbClr val="111111"/>
-              </a:solidFill>
-              <a:latin typeface="Arial" panose="020B0604020202020204" pitchFamily="34" charset="0"/>
-            </a:endParaRPr>
+              <a:t>このプロジェクトは何を解決する？</a:t>
+            </a:r>
           </a:p>
         </p:txBody>
       </p:sp>
@@ -4055,7 +4046,7 @@
           <p:cNvPr id="4" name="テキスト ボックス 3">
             <a:extLst>
               <a:ext uri="{FF2B5EF4-FFF2-40B4-BE49-F238E27FC236}">
-                <a16:creationId xmlns:a16="http://schemas.microsoft.com/office/drawing/2014/main" id="{02A824DC-3537-7B59-DA65-FDC9EE719F29}"/>
+                <a16:creationId xmlns:a16="http://schemas.microsoft.com/office/drawing/2014/main" id="{C73C28DA-BCA1-C353-8BD5-486209F920F0}"/>
               </a:ext>
             </a:extLst>
           </p:cNvPr>
@@ -4095,7 +4086,7 @@
           <p:cNvPr id="5" name="テキスト ボックス 4">
             <a:extLst>
               <a:ext uri="{FF2B5EF4-FFF2-40B4-BE49-F238E27FC236}">
-                <a16:creationId xmlns:a16="http://schemas.microsoft.com/office/drawing/2014/main" id="{97EB6352-CDE2-316B-B0D8-1A734198489C}"/>
+                <a16:creationId xmlns:a16="http://schemas.microsoft.com/office/drawing/2014/main" id="{BA08E54A-D1F8-9910-A86E-8D6ED561FE31}"/>
               </a:ext>
             </a:extLst>
           </p:cNvPr>
@@ -4142,7 +4133,7 @@
             <a:hlinkClick r:id="" action="ppaction://media"/>
             <a:extLst>
               <a:ext uri="{FF2B5EF4-FFF2-40B4-BE49-F238E27FC236}">
-                <a16:creationId xmlns:a16="http://schemas.microsoft.com/office/drawing/2014/main" id="{D0D8E0FA-5051-36FB-7E4E-75E74FA1399E}"/>
+                <a16:creationId xmlns:a16="http://schemas.microsoft.com/office/drawing/2014/main" id="{A7706B0F-77E0-85B3-8B07-B1C1F6370312}"/>
               </a:ext>
             </a:extLst>
           </p:cNvPr>
@@ -4177,7 +4168,7 @@
     </p:spTree>
     <p:extLst>
       <p:ext uri="{BB962C8B-B14F-4D97-AF65-F5344CB8AC3E}">
-        <p14:creationId xmlns:p14="http://schemas.microsoft.com/office/powerpoint/2010/main" val="4202664798"/>
+        <p14:creationId xmlns:p14="http://schemas.microsoft.com/office/powerpoint/2010/main" val="350185405"/>
       </p:ext>
     </p:extLst>
   </p:cSld>
@@ -4301,7 +4292,7 @@
           <p:cNvPr id="2" name="テキスト ボックス 1">
             <a:extLst>
               <a:ext uri="{FF2B5EF4-FFF2-40B4-BE49-F238E27FC236}">
-                <a16:creationId xmlns:a16="http://schemas.microsoft.com/office/drawing/2014/main" id="{B6B48C05-DF62-109B-0B45-074EE58DE016}"/>
+                <a16:creationId xmlns:a16="http://schemas.microsoft.com/office/drawing/2014/main" id="{7098FD13-77A3-C816-CC96-89FA84758E03}"/>
               </a:ext>
             </a:extLst>
           </p:cNvPr>
@@ -4347,7 +4338,7 @@
           <p:cNvPr id="3" name="テキスト ボックス 2">
             <a:extLst>
               <a:ext uri="{FF2B5EF4-FFF2-40B4-BE49-F238E27FC236}">
-                <a16:creationId xmlns:a16="http://schemas.microsoft.com/office/drawing/2014/main" id="{9A2A79CA-62E4-E810-00CE-A75729558950}"/>
+                <a16:creationId xmlns:a16="http://schemas.microsoft.com/office/drawing/2014/main" id="{C52825C9-F5DD-2F9A-0E07-07503A485579}"/>
               </a:ext>
             </a:extLst>
           </p:cNvPr>
@@ -4371,20 +4362,14 @@
           <a:lstStyle/>
           <a:p>
             <a:r>
-              <a:rPr kumimoji="1" lang="en-US" altLang="ja-JP" sz="3400" b="1">
+              <a:rPr kumimoji="1" lang="ja-JP" altLang="en-US" sz="3400" b="1">
                 <a:solidFill>
                   <a:srgbClr val="111111"/>
                 </a:solidFill>
                 <a:latin typeface="Arial" panose="020B0604020202020204" pitchFamily="34" charset="0"/>
               </a:rPr>
-              <a:t>TECH STACK</a:t>
-            </a:r>
-            <a:endParaRPr kumimoji="1" lang="ja-JP" altLang="en-US" sz="3400" b="1">
-              <a:solidFill>
-                <a:srgbClr val="111111"/>
-              </a:solidFill>
-              <a:latin typeface="Arial" panose="020B0604020202020204" pitchFamily="34" charset="0"/>
-            </a:endParaRPr>
+              <a:t>技術スタック</a:t>
+            </a:r>
           </a:p>
         </p:txBody>
       </p:sp>
@@ -4393,7 +4378,7 @@
           <p:cNvPr id="4" name="テキスト ボックス 3">
             <a:extLst>
               <a:ext uri="{FF2B5EF4-FFF2-40B4-BE49-F238E27FC236}">
-                <a16:creationId xmlns:a16="http://schemas.microsoft.com/office/drawing/2014/main" id="{3F5C8AD5-283C-DF70-EA34-55E0F0CBC4C9}"/>
+                <a16:creationId xmlns:a16="http://schemas.microsoft.com/office/drawing/2014/main" id="{BAF2229B-15F2-981C-601C-5DD555E1E62D}"/>
               </a:ext>
             </a:extLst>
           </p:cNvPr>
@@ -4403,7 +4388,7 @@
         <p:spPr>
           <a:xfrm>
             <a:off x="533400" y="3429000"/>
-            <a:ext cx="10795000" cy="400110"/>
+            <a:ext cx="10795000" cy="707886"/>
           </a:xfrm>
           <a:prstGeom prst="rect">
             <a:avLst/>
@@ -4417,13 +4402,22 @@
           <a:lstStyle/>
           <a:p>
             <a:r>
+              <a:rPr kumimoji="1" lang="ja-JP" altLang="en-US" sz="2000">
+                <a:solidFill>
+                  <a:srgbClr val="333333"/>
+                </a:solidFill>
+                <a:latin typeface="Arial" panose="020B0604020202020204" pitchFamily="34" charset="0"/>
+              </a:rPr>
+              <a:t>主要技術：</a:t>
+            </a:r>
+            <a:r>
               <a:rPr kumimoji="1" lang="en-US" altLang="ja-JP" sz="2000">
                 <a:solidFill>
                   <a:srgbClr val="333333"/>
                 </a:solidFill>
                 <a:latin typeface="Arial" panose="020B0604020202020204" pitchFamily="34" charset="0"/>
               </a:rPr>
-              <a:t>Primary technologies: TypeScript</a:t>
+              <a:t>TypeScript</a:t>
             </a:r>
             <a:r>
               <a:rPr kumimoji="1" lang="ja-JP" altLang="en-US" sz="2000">
@@ -4459,14 +4453,18 @@
                 </a:solidFill>
                 <a:latin typeface="Arial" panose="020B0604020202020204" pitchFamily="34" charset="0"/>
               </a:rPr>
-              <a:t>CSS</a:t>
-            </a:r>
-            <a:endParaRPr kumimoji="1" lang="ja-JP" altLang="en-US" sz="2000">
-              <a:solidFill>
-                <a:srgbClr val="333333"/>
-              </a:solidFill>
-              <a:latin typeface="Arial" panose="020B0604020202020204" pitchFamily="34" charset="0"/>
-            </a:endParaRPr>
+              <a:t>CSS
+</a:t>
+            </a:r>
+            <a:r>
+              <a:rPr kumimoji="1" lang="ja-JP" altLang="en-US" sz="2000">
+                <a:solidFill>
+                  <a:srgbClr val="333333"/>
+                </a:solidFill>
+                <a:latin typeface="Arial" panose="020B0604020202020204" pitchFamily="34" charset="0"/>
+              </a:rPr>
+              <a:t>役割を分け、保守しやすい構成を目指しています。</a:t>
+            </a:r>
           </a:p>
         </p:txBody>
       </p:sp>
@@ -4475,7 +4473,7 @@
           <p:cNvPr id="5" name="テキスト ボックス 4">
             <a:extLst>
               <a:ext uri="{FF2B5EF4-FFF2-40B4-BE49-F238E27FC236}">
-                <a16:creationId xmlns:a16="http://schemas.microsoft.com/office/drawing/2014/main" id="{7500B5C1-4186-35DA-A9F6-ECD2C5866C4A}"/>
+                <a16:creationId xmlns:a16="http://schemas.microsoft.com/office/drawing/2014/main" id="{D0F0C3D5-0833-C27C-54B9-F0E6991BDFA9}"/>
               </a:ext>
             </a:extLst>
           </p:cNvPr>
@@ -4522,7 +4520,7 @@
             <a:hlinkClick r:id="" action="ppaction://media"/>
             <a:extLst>
               <a:ext uri="{FF2B5EF4-FFF2-40B4-BE49-F238E27FC236}">
-                <a16:creationId xmlns:a16="http://schemas.microsoft.com/office/drawing/2014/main" id="{EED3D6C6-A936-845F-B9A1-9EA9C4D5AA02}"/>
+                <a16:creationId xmlns:a16="http://schemas.microsoft.com/office/drawing/2014/main" id="{9A307779-C1EC-00E0-3058-3209541CA81A}"/>
               </a:ext>
             </a:extLst>
           </p:cNvPr>
@@ -4557,7 +4555,7 @@
     </p:spTree>
     <p:extLst>
       <p:ext uri="{BB962C8B-B14F-4D97-AF65-F5344CB8AC3E}">
-        <p14:creationId xmlns:p14="http://schemas.microsoft.com/office/powerpoint/2010/main" val="2219471029"/>
+        <p14:creationId xmlns:p14="http://schemas.microsoft.com/office/powerpoint/2010/main" val="1184095740"/>
       </p:ext>
     </p:extLst>
   </p:cSld>
@@ -4681,7 +4679,7 @@
           <p:cNvPr id="2" name="テキスト ボックス 1">
             <a:extLst>
               <a:ext uri="{FF2B5EF4-FFF2-40B4-BE49-F238E27FC236}">
-                <a16:creationId xmlns:a16="http://schemas.microsoft.com/office/drawing/2014/main" id="{904D933F-D302-F0DC-86E0-C37220E30CA6}"/>
+                <a16:creationId xmlns:a16="http://schemas.microsoft.com/office/drawing/2014/main" id="{2E3726A8-B9D9-AC80-7659-9FB9282CA768}"/>
               </a:ext>
             </a:extLst>
           </p:cNvPr>
@@ -4727,7 +4725,7 @@
           <p:cNvPr id="3" name="テキスト ボックス 2">
             <a:extLst>
               <a:ext uri="{FF2B5EF4-FFF2-40B4-BE49-F238E27FC236}">
-                <a16:creationId xmlns:a16="http://schemas.microsoft.com/office/drawing/2014/main" id="{AFE82F8A-1D64-F535-89B4-21CEBC6EBE68}"/>
+                <a16:creationId xmlns:a16="http://schemas.microsoft.com/office/drawing/2014/main" id="{C3DAE8BD-D44A-8379-5E8A-A0155DA08266}"/>
               </a:ext>
             </a:extLst>
           </p:cNvPr>
@@ -4751,20 +4749,14 @@
           <a:lstStyle/>
           <a:p>
             <a:r>
-              <a:rPr kumimoji="1" lang="en-US" altLang="ja-JP" sz="3400" b="1">
+              <a:rPr kumimoji="1" lang="ja-JP" altLang="en-US" sz="3400" b="1">
                 <a:solidFill>
                   <a:srgbClr val="111111"/>
                 </a:solidFill>
                 <a:latin typeface="Arial" panose="020B0604020202020204" pitchFamily="34" charset="0"/>
               </a:rPr>
-              <a:t>REPOSITORY HIGHLIGHTS</a:t>
-            </a:r>
-            <a:endParaRPr kumimoji="1" lang="ja-JP" altLang="en-US" sz="3400" b="1">
-              <a:solidFill>
-                <a:srgbClr val="111111"/>
-              </a:solidFill>
-              <a:latin typeface="Arial" panose="020B0604020202020204" pitchFamily="34" charset="0"/>
-            </a:endParaRPr>
+              <a:t>リポジトリの読みどころ</a:t>
+            </a:r>
           </a:p>
         </p:txBody>
       </p:sp>
@@ -4773,7 +4765,7 @@
           <p:cNvPr id="4" name="テキスト ボックス 3">
             <a:extLst>
               <a:ext uri="{FF2B5EF4-FFF2-40B4-BE49-F238E27FC236}">
-                <a16:creationId xmlns:a16="http://schemas.microsoft.com/office/drawing/2014/main" id="{C00A3005-1019-03E4-EB0A-119B335F61FF}"/>
+                <a16:creationId xmlns:a16="http://schemas.microsoft.com/office/drawing/2014/main" id="{54406CF2-BD1D-F745-6065-ABFAB941DE47}"/>
               </a:ext>
             </a:extLst>
           </p:cNvPr>
@@ -4783,7 +4775,7 @@
         <p:spPr>
           <a:xfrm>
             <a:off x="533400" y="3429000"/>
-            <a:ext cx="10795000" cy="400110"/>
+            <a:ext cx="10795000" cy="707886"/>
           </a:xfrm>
           <a:prstGeom prst="rect">
             <a:avLst/>
@@ -4797,13 +4789,77 @@
           <a:lstStyle/>
           <a:p>
             <a:r>
+              <a:rPr kumimoji="1" lang="ja-JP" altLang="en-US" sz="2000">
+                <a:solidFill>
+                  <a:srgbClr val="333333"/>
+                </a:solidFill>
+                <a:latin typeface="Arial" panose="020B0604020202020204" pitchFamily="34" charset="0"/>
+              </a:rPr>
+              <a:t>公開コード、</a:t>
+            </a:r>
+            <a:r>
               <a:rPr kumimoji="1" lang="en-US" altLang="ja-JP" sz="2000">
                 <a:solidFill>
                   <a:srgbClr val="333333"/>
                 </a:solidFill>
                 <a:latin typeface="Arial" panose="020B0604020202020204" pitchFamily="34" charset="0"/>
               </a:rPr>
-              <a:t>Public source code, README and commit history reveal the design decisions.</a:t>
+              <a:t>README</a:t>
+            </a:r>
+            <a:r>
+              <a:rPr kumimoji="1" lang="ja-JP" altLang="en-US" sz="2000">
+                <a:solidFill>
+                  <a:srgbClr val="333333"/>
+                </a:solidFill>
+                <a:latin typeface="Arial" panose="020B0604020202020204" pitchFamily="34" charset="0"/>
+              </a:rPr>
+              <a:t>、コミット履歴から設計判断を確認できます。
+主なファイル：</a:t>
+            </a:r>
+            <a:r>
+              <a:rPr kumimoji="1" lang="en-US" altLang="ja-JP" sz="2000">
+                <a:solidFill>
+                  <a:srgbClr val="333333"/>
+                </a:solidFill>
+                <a:latin typeface="Arial" panose="020B0604020202020204" pitchFamily="34" charset="0"/>
+              </a:rPr>
+              <a:t>README.md</a:t>
+            </a:r>
+            <a:r>
+              <a:rPr kumimoji="1" lang="ja-JP" altLang="en-US" sz="2000">
+                <a:solidFill>
+                  <a:srgbClr val="333333"/>
+                </a:solidFill>
+                <a:latin typeface="Arial" panose="020B0604020202020204" pitchFamily="34" charset="0"/>
+              </a:rPr>
+              <a:t>、</a:t>
+            </a:r>
+            <a:r>
+              <a:rPr kumimoji="1" lang="en-US" altLang="ja-JP" sz="2000">
+                <a:solidFill>
+                  <a:srgbClr val="333333"/>
+                </a:solidFill>
+                <a:latin typeface="Arial" panose="020B0604020202020204" pitchFamily="34" charset="0"/>
+              </a:rPr>
+              <a:t>app</a:t>
+            </a:r>
+            <a:r>
+              <a:rPr kumimoji="1" lang="ja-JP" altLang="en-US" sz="2000">
+                <a:solidFill>
+                  <a:srgbClr val="333333"/>
+                </a:solidFill>
+                <a:latin typeface="Arial" panose="020B0604020202020204" pitchFamily="34" charset="0"/>
+              </a:rPr>
+              <a:t>、</a:t>
+            </a:r>
+            <a:r>
+              <a:rPr kumimoji="1" lang="en-US" altLang="ja-JP" sz="2000">
+                <a:solidFill>
+                  <a:srgbClr val="333333"/>
+                </a:solidFill>
+                <a:latin typeface="Arial" panose="020B0604020202020204" pitchFamily="34" charset="0"/>
+              </a:rPr>
+              <a:t>build</a:t>
             </a:r>
             <a:endParaRPr kumimoji="1" lang="ja-JP" altLang="en-US" sz="2000">
               <a:solidFill>
@@ -4819,7 +4875,7 @@
           <p:cNvPr id="5" name="テキスト ボックス 4">
             <a:extLst>
               <a:ext uri="{FF2B5EF4-FFF2-40B4-BE49-F238E27FC236}">
-                <a16:creationId xmlns:a16="http://schemas.microsoft.com/office/drawing/2014/main" id="{783E5CE5-5044-D4C3-A47A-82978E4D94C3}"/>
+                <a16:creationId xmlns:a16="http://schemas.microsoft.com/office/drawing/2014/main" id="{324B762D-894E-C320-E5C3-B81819FB949F}"/>
               </a:ext>
             </a:extLst>
           </p:cNvPr>
@@ -4866,7 +4922,7 @@
             <a:hlinkClick r:id="" action="ppaction://media"/>
             <a:extLst>
               <a:ext uri="{FF2B5EF4-FFF2-40B4-BE49-F238E27FC236}">
-                <a16:creationId xmlns:a16="http://schemas.microsoft.com/office/drawing/2014/main" id="{567B6C71-1BE2-C0A8-1A13-89C2C53F3B17}"/>
+                <a16:creationId xmlns:a16="http://schemas.microsoft.com/office/drawing/2014/main" id="{791EE667-EDE8-BBA8-A91E-A5E9B5AE2CCC}"/>
               </a:ext>
             </a:extLst>
           </p:cNvPr>
@@ -4901,7 +4957,7 @@
     </p:spTree>
     <p:extLst>
       <p:ext uri="{BB962C8B-B14F-4D97-AF65-F5344CB8AC3E}">
-        <p14:creationId xmlns:p14="http://schemas.microsoft.com/office/powerpoint/2010/main" val="3498003266"/>
+        <p14:creationId xmlns:p14="http://schemas.microsoft.com/office/powerpoint/2010/main" val="966089549"/>
       </p:ext>
     </p:extLst>
   </p:cSld>
@@ -5025,7 +5081,7 @@
           <p:cNvPr id="2" name="テキスト ボックス 1">
             <a:extLst>
               <a:ext uri="{FF2B5EF4-FFF2-40B4-BE49-F238E27FC236}">
-                <a16:creationId xmlns:a16="http://schemas.microsoft.com/office/drawing/2014/main" id="{529F6153-C1FE-D254-E9C0-411F2026E302}"/>
+                <a16:creationId xmlns:a16="http://schemas.microsoft.com/office/drawing/2014/main" id="{086AA8C7-2452-DF1D-B584-E3EC5532AEFF}"/>
               </a:ext>
             </a:extLst>
           </p:cNvPr>
@@ -5071,7 +5127,7 @@
           <p:cNvPr id="3" name="テキスト ボックス 2">
             <a:extLst>
               <a:ext uri="{FF2B5EF4-FFF2-40B4-BE49-F238E27FC236}">
-                <a16:creationId xmlns:a16="http://schemas.microsoft.com/office/drawing/2014/main" id="{33A0C2B4-4400-CB3D-F909-FE7E24FC8745}"/>
+                <a16:creationId xmlns:a16="http://schemas.microsoft.com/office/drawing/2014/main" id="{90F74181-FE6A-DDB6-09AA-18E38D9519A3}"/>
               </a:ext>
             </a:extLst>
           </p:cNvPr>
@@ -5095,20 +5151,14 @@
           <a:lstStyle/>
           <a:p>
             <a:r>
-              <a:rPr kumimoji="1" lang="en-US" altLang="ja-JP" sz="3400" b="1">
+              <a:rPr kumimoji="1" lang="ja-JP" altLang="en-US" sz="3400" b="1">
                 <a:solidFill>
                   <a:srgbClr val="111111"/>
                 </a:solidFill>
                 <a:latin typeface="Arial" panose="020B0604020202020204" pitchFamily="34" charset="0"/>
               </a:rPr>
-              <a:t>ITERATIVE IMPROVEMENT</a:t>
-            </a:r>
-            <a:endParaRPr kumimoji="1" lang="ja-JP" altLang="en-US" sz="3400" b="1">
-              <a:solidFill>
-                <a:srgbClr val="111111"/>
-              </a:solidFill>
-              <a:latin typeface="Arial" panose="020B0604020202020204" pitchFamily="34" charset="0"/>
-            </a:endParaRPr>
+              <a:t>コミットから分かる改善</a:t>
+            </a:r>
           </a:p>
         </p:txBody>
       </p:sp>
@@ -5117,7 +5167,7 @@
           <p:cNvPr id="4" name="テキスト ボックス 3">
             <a:extLst>
               <a:ext uri="{FF2B5EF4-FFF2-40B4-BE49-F238E27FC236}">
-                <a16:creationId xmlns:a16="http://schemas.microsoft.com/office/drawing/2014/main" id="{1937FDD3-2362-E6EB-9197-F28EA47CD786}"/>
+                <a16:creationId xmlns:a16="http://schemas.microsoft.com/office/drawing/2014/main" id="{639EEE76-F1D4-E71E-A6B5-222BDB6E8D72}"/>
               </a:ext>
             </a:extLst>
           </p:cNvPr>
@@ -5147,7 +5197,7 @@
                 </a:solidFill>
                 <a:latin typeface="Arial" panose="020B0604020202020204" pitchFamily="34" charset="0"/>
               </a:rPr>
-              <a:t>Small commits continuously improve features, quality and release readiness.</a:t>
+              <a:t>feat: prioritize helpful discovery on home</a:t>
             </a:r>
             <a:endParaRPr kumimoji="1" lang="ja-JP" altLang="en-US" sz="2000">
               <a:solidFill>
@@ -5163,7 +5213,7 @@
           <p:cNvPr id="5" name="テキスト ボックス 4">
             <a:extLst>
               <a:ext uri="{FF2B5EF4-FFF2-40B4-BE49-F238E27FC236}">
-                <a16:creationId xmlns:a16="http://schemas.microsoft.com/office/drawing/2014/main" id="{2F5BABAE-1BB5-23EC-60C7-DEECDA6E0E86}"/>
+                <a16:creationId xmlns:a16="http://schemas.microsoft.com/office/drawing/2014/main" id="{DE431686-333A-57CC-9A0F-AB1313BAAEFF}"/>
               </a:ext>
             </a:extLst>
           </p:cNvPr>
@@ -5210,7 +5260,7 @@
             <a:hlinkClick r:id="" action="ppaction://media"/>
             <a:extLst>
               <a:ext uri="{FF2B5EF4-FFF2-40B4-BE49-F238E27FC236}">
-                <a16:creationId xmlns:a16="http://schemas.microsoft.com/office/drawing/2014/main" id="{77F6E100-9E54-73F7-C9BA-B7C81E4F0340}"/>
+                <a16:creationId xmlns:a16="http://schemas.microsoft.com/office/drawing/2014/main" id="{1DD19179-2E39-48D7-7FB0-F0D4E234B8B7}"/>
               </a:ext>
             </a:extLst>
           </p:cNvPr>
@@ -5245,7 +5295,7 @@
     </p:spTree>
     <p:extLst>
       <p:ext uri="{BB962C8B-B14F-4D97-AF65-F5344CB8AC3E}">
-        <p14:creationId xmlns:p14="http://schemas.microsoft.com/office/powerpoint/2010/main" val="41155112"/>
+        <p14:creationId xmlns:p14="http://schemas.microsoft.com/office/powerpoint/2010/main" val="2541472925"/>
       </p:ext>
     </p:extLst>
   </p:cSld>
@@ -5369,7 +5419,7 @@
           <p:cNvPr id="2" name="テキスト ボックス 1">
             <a:extLst>
               <a:ext uri="{FF2B5EF4-FFF2-40B4-BE49-F238E27FC236}">
-                <a16:creationId xmlns:a16="http://schemas.microsoft.com/office/drawing/2014/main" id="{D94A152E-77CD-2F8E-D8CC-73868FD59022}"/>
+                <a16:creationId xmlns:a16="http://schemas.microsoft.com/office/drawing/2014/main" id="{785BE269-8BD2-B470-06C3-E6D0168FD66B}"/>
               </a:ext>
             </a:extLst>
           </p:cNvPr>
@@ -5415,7 +5465,7 @@
           <p:cNvPr id="3" name="テキスト ボックス 2">
             <a:extLst>
               <a:ext uri="{FF2B5EF4-FFF2-40B4-BE49-F238E27FC236}">
-                <a16:creationId xmlns:a16="http://schemas.microsoft.com/office/drawing/2014/main" id="{8B7820DF-D36A-F29C-BA58-EEC6F7266055}"/>
+                <a16:creationId xmlns:a16="http://schemas.microsoft.com/office/drawing/2014/main" id="{25C6C81C-C0AF-EFA3-19EE-CD1399F1FEFD}"/>
               </a:ext>
             </a:extLst>
           </p:cNvPr>
@@ -5439,20 +5489,14 @@
           <a:lstStyle/>
           <a:p>
             <a:r>
-              <a:rPr kumimoji="1" lang="en-US" altLang="ja-JP" sz="3400" b="1">
+              <a:rPr kumimoji="1" lang="ja-JP" altLang="en-US" sz="3400" b="1">
                 <a:solidFill>
                   <a:srgbClr val="111111"/>
                 </a:solidFill>
                 <a:latin typeface="Arial" panose="020B0604020202020204" pitchFamily="34" charset="0"/>
               </a:rPr>
-              <a:t>READ THE FULL ARTICLE</a:t>
-            </a:r>
-            <a:endParaRPr kumimoji="1" lang="ja-JP" altLang="en-US" sz="3400" b="1">
-              <a:solidFill>
-                <a:srgbClr val="111111"/>
-              </a:solidFill>
-              <a:latin typeface="Arial" panose="020B0604020202020204" pitchFamily="34" charset="0"/>
-            </a:endParaRPr>
+              <a:t>詳しくは積み上げログへ</a:t>
+            </a:r>
           </a:p>
         </p:txBody>
       </p:sp>
@@ -5461,7 +5505,7 @@
           <p:cNvPr id="4" name="テキスト ボックス 3">
             <a:extLst>
               <a:ext uri="{FF2B5EF4-FFF2-40B4-BE49-F238E27FC236}">
-                <a16:creationId xmlns:a16="http://schemas.microsoft.com/office/drawing/2014/main" id="{CAB55E47-F989-607C-833C-930FDCB279FD}"/>
+                <a16:creationId xmlns:a16="http://schemas.microsoft.com/office/drawing/2014/main" id="{2C968602-5877-D18D-F095-8C7761D6243F}"/>
               </a:ext>
             </a:extLst>
           </p:cNvPr>
@@ -5485,14 +5529,32 @@
           <a:lstStyle/>
           <a:p>
             <a:r>
-              <a:rPr kumimoji="1" lang="sv-SE" altLang="ja-JP" sz="2000">
+              <a:rPr kumimoji="1" lang="zh-TW" altLang="en-US" sz="2000">
+                <a:solidFill>
+                  <a:srgbClr val="333333"/>
+                </a:solidFill>
+                <a:latin typeface="Arial" panose="020B0604020202020204" pitchFamily="34" charset="0"/>
+              </a:rPr>
+              <a:t>記事： </a:t>
+            </a:r>
+            <a:r>
+              <a:rPr kumimoji="1" lang="en-US" altLang="zh-TW" sz="2000">
                 <a:solidFill>
                   <a:srgbClr val="333333"/>
                 </a:solidFill>
                 <a:latin typeface="Arial" panose="020B0604020202020204" pitchFamily="34" charset="0"/>
               </a:rPr>
               <a:t>https://syunnjack.dev/articles/local-service-finder
-TSUMIAGE LOG</a:t>
+</a:t>
+            </a:r>
+            <a:r>
+              <a:rPr kumimoji="1" lang="zh-TW" altLang="en-US" sz="2000">
+                <a:solidFill>
+                  <a:srgbClr val="333333"/>
+                </a:solidFill>
+                <a:latin typeface="Arial" panose="020B0604020202020204" pitchFamily="34" charset="0"/>
+              </a:rPr>
+              <a:t>学び、作り、振り返る開発記録。</a:t>
             </a:r>
             <a:endParaRPr kumimoji="1" lang="ja-JP" altLang="en-US" sz="2000">
               <a:solidFill>
@@ -5508,7 +5570,7 @@
           <p:cNvPr id="5" name="テキスト ボックス 4">
             <a:extLst>
               <a:ext uri="{FF2B5EF4-FFF2-40B4-BE49-F238E27FC236}">
-                <a16:creationId xmlns:a16="http://schemas.microsoft.com/office/drawing/2014/main" id="{368BF28D-B024-253E-887F-09849B37ED3B}"/>
+                <a16:creationId xmlns:a16="http://schemas.microsoft.com/office/drawing/2014/main" id="{0556D854-E634-557E-CCFD-55B57E1881CA}"/>
               </a:ext>
             </a:extLst>
           </p:cNvPr>
@@ -5555,7 +5617,7 @@
             <a:hlinkClick r:id="" action="ppaction://media"/>
             <a:extLst>
               <a:ext uri="{FF2B5EF4-FFF2-40B4-BE49-F238E27FC236}">
-                <a16:creationId xmlns:a16="http://schemas.microsoft.com/office/drawing/2014/main" id="{F33404E5-0B26-4231-22B3-6A15A8D9D557}"/>
+                <a16:creationId xmlns:a16="http://schemas.microsoft.com/office/drawing/2014/main" id="{0A3C303D-C27B-6C4E-5C85-72B94B76CA89}"/>
               </a:ext>
             </a:extLst>
           </p:cNvPr>
@@ -5590,7 +5652,7 @@
     </p:spTree>
     <p:extLst>
       <p:ext uri="{BB962C8B-B14F-4D97-AF65-F5344CB8AC3E}">
-        <p14:creationId xmlns:p14="http://schemas.microsoft.com/office/powerpoint/2010/main" val="4158322185"/>
+        <p14:creationId xmlns:p14="http://schemas.microsoft.com/office/powerpoint/2010/main" val="3229141202"/>
       </p:ext>
     </p:extLst>
   </p:cSld>

--- a/public/videos/repositories/local-service-finder/local-service-finder-tech-preview.pptx
+++ b/public/videos/repositories/local-service-finder/local-service-finder-tech-preview.pptx
@@ -134,7 +134,7 @@
           <p:cNvPr id="2" name="タイトル 1">
             <a:extLst>
               <a:ext uri="{FF2B5EF4-FFF2-40B4-BE49-F238E27FC236}">
-                <a16:creationId xmlns:a16="http://schemas.microsoft.com/office/drawing/2014/main" id="{A49DDDD8-AB08-9F65-637D-26B723B30DA0}"/>
+                <a16:creationId xmlns:a16="http://schemas.microsoft.com/office/drawing/2014/main" id="{553503F7-F08B-F02F-6392-533F015FCEE8}"/>
               </a:ext>
             </a:extLst>
           </p:cNvPr>
@@ -171,7 +171,7 @@
           <p:cNvPr id="3" name="字幕 2">
             <a:extLst>
               <a:ext uri="{FF2B5EF4-FFF2-40B4-BE49-F238E27FC236}">
-                <a16:creationId xmlns:a16="http://schemas.microsoft.com/office/drawing/2014/main" id="{1897F1E6-98FE-D88A-E48C-138EFF4B3AA4}"/>
+                <a16:creationId xmlns:a16="http://schemas.microsoft.com/office/drawing/2014/main" id="{17080C99-425E-1EFF-BE7C-63CA6F53F061}"/>
               </a:ext>
             </a:extLst>
           </p:cNvPr>
@@ -241,7 +241,7 @@
           <p:cNvPr id="4" name="日付プレースホルダー 3">
             <a:extLst>
               <a:ext uri="{FF2B5EF4-FFF2-40B4-BE49-F238E27FC236}">
-                <a16:creationId xmlns:a16="http://schemas.microsoft.com/office/drawing/2014/main" id="{4EB30B4A-17D9-E626-AAD3-538A7A458B7E}"/>
+                <a16:creationId xmlns:a16="http://schemas.microsoft.com/office/drawing/2014/main" id="{67AD8015-66C7-AFB4-28C6-812E5694BE05}"/>
               </a:ext>
             </a:extLst>
           </p:cNvPr>
@@ -257,7 +257,7 @@
           <a:bodyPr/>
           <a:lstStyle/>
           <a:p>
-            <a:fld id="{47C164C1-C361-41F3-8408-E012A298061A}" type="datetimeFigureOut">
+            <a:fld id="{1BFF2664-D56C-4020-BDA7-6855D4114E19}" type="datetimeFigureOut">
               <a:rPr kumimoji="1" lang="ja-JP" altLang="en-US" smtClean="0"/>
               <a:t>2026/7/30</a:t>
             </a:fld>
@@ -270,7 +270,7 @@
           <p:cNvPr id="5" name="フッター プレースホルダー 4">
             <a:extLst>
               <a:ext uri="{FF2B5EF4-FFF2-40B4-BE49-F238E27FC236}">
-                <a16:creationId xmlns:a16="http://schemas.microsoft.com/office/drawing/2014/main" id="{C9C87354-1674-44C7-96FE-CFEB44F167E3}"/>
+                <a16:creationId xmlns:a16="http://schemas.microsoft.com/office/drawing/2014/main" id="{7E8C7C01-2138-68F9-13F8-61597F676A91}"/>
               </a:ext>
             </a:extLst>
           </p:cNvPr>
@@ -295,7 +295,7 @@
           <p:cNvPr id="6" name="スライド番号プレースホルダー 5">
             <a:extLst>
               <a:ext uri="{FF2B5EF4-FFF2-40B4-BE49-F238E27FC236}">
-                <a16:creationId xmlns:a16="http://schemas.microsoft.com/office/drawing/2014/main" id="{419D29D6-5846-4270-CA3D-98B2067A9966}"/>
+                <a16:creationId xmlns:a16="http://schemas.microsoft.com/office/drawing/2014/main" id="{B095BF6C-C593-04F6-DD76-4D5E11EE1023}"/>
               </a:ext>
             </a:extLst>
           </p:cNvPr>
@@ -311,7 +311,7 @@
           <a:bodyPr/>
           <a:lstStyle/>
           <a:p>
-            <a:fld id="{EA8BC1D6-A548-4A62-A106-3BCC4D337BCD}" type="slidenum">
+            <a:fld id="{1F78B73D-BD89-4C29-A720-EEB8AC92D2C1}" type="slidenum">
               <a:rPr kumimoji="1" lang="ja-JP" altLang="en-US" smtClean="0"/>
               <a:t>‹#›</a:t>
             </a:fld>
@@ -322,7 +322,7 @@
     </p:spTree>
     <p:extLst>
       <p:ext uri="{BB962C8B-B14F-4D97-AF65-F5344CB8AC3E}">
-        <p14:creationId xmlns:p14="http://schemas.microsoft.com/office/powerpoint/2010/main" val="1844857656"/>
+        <p14:creationId xmlns:p14="http://schemas.microsoft.com/office/powerpoint/2010/main" val="2030303928"/>
       </p:ext>
     </p:extLst>
   </p:cSld>
@@ -354,7 +354,7 @@
           <p:cNvPr id="2" name="タイトル 1">
             <a:extLst>
               <a:ext uri="{FF2B5EF4-FFF2-40B4-BE49-F238E27FC236}">
-                <a16:creationId xmlns:a16="http://schemas.microsoft.com/office/drawing/2014/main" id="{2ED3540B-39A4-4E1A-04E7-DD9F700EE211}"/>
+                <a16:creationId xmlns:a16="http://schemas.microsoft.com/office/drawing/2014/main" id="{1CC2BE1D-44D5-6DB7-ED86-1AFA6463F13C}"/>
               </a:ext>
             </a:extLst>
           </p:cNvPr>
@@ -382,7 +382,7 @@
           <p:cNvPr id="3" name="縦書きテキスト プレースホルダー 2">
             <a:extLst>
               <a:ext uri="{FF2B5EF4-FFF2-40B4-BE49-F238E27FC236}">
-                <a16:creationId xmlns:a16="http://schemas.microsoft.com/office/drawing/2014/main" id="{99A6EE56-C676-E8B9-E861-A87C3BC52CFA}"/>
+                <a16:creationId xmlns:a16="http://schemas.microsoft.com/office/drawing/2014/main" id="{7963AF70-BA4A-F66C-9B03-7F336545C796}"/>
               </a:ext>
             </a:extLst>
           </p:cNvPr>
@@ -471,7 +471,7 @@
           <p:cNvPr id="4" name="日付プレースホルダー 3">
             <a:extLst>
               <a:ext uri="{FF2B5EF4-FFF2-40B4-BE49-F238E27FC236}">
-                <a16:creationId xmlns:a16="http://schemas.microsoft.com/office/drawing/2014/main" id="{B1FA7B01-19FB-047C-A3F8-409B1F32F9F6}"/>
+                <a16:creationId xmlns:a16="http://schemas.microsoft.com/office/drawing/2014/main" id="{E25E9312-0F2B-51DD-81EC-42B79B749346}"/>
               </a:ext>
             </a:extLst>
           </p:cNvPr>
@@ -487,7 +487,7 @@
           <a:bodyPr/>
           <a:lstStyle/>
           <a:p>
-            <a:fld id="{47C164C1-C361-41F3-8408-E012A298061A}" type="datetimeFigureOut">
+            <a:fld id="{1BFF2664-D56C-4020-BDA7-6855D4114E19}" type="datetimeFigureOut">
               <a:rPr kumimoji="1" lang="ja-JP" altLang="en-US" smtClean="0"/>
               <a:t>2026/7/30</a:t>
             </a:fld>
@@ -500,7 +500,7 @@
           <p:cNvPr id="5" name="フッター プレースホルダー 4">
             <a:extLst>
               <a:ext uri="{FF2B5EF4-FFF2-40B4-BE49-F238E27FC236}">
-                <a16:creationId xmlns:a16="http://schemas.microsoft.com/office/drawing/2014/main" id="{3C5E4303-E986-B67F-3F33-F99BDC1C708C}"/>
+                <a16:creationId xmlns:a16="http://schemas.microsoft.com/office/drawing/2014/main" id="{D0FA84C3-151E-15A2-A569-7A30DD36FB58}"/>
               </a:ext>
             </a:extLst>
           </p:cNvPr>
@@ -525,7 +525,7 @@
           <p:cNvPr id="6" name="スライド番号プレースホルダー 5">
             <a:extLst>
               <a:ext uri="{FF2B5EF4-FFF2-40B4-BE49-F238E27FC236}">
-                <a16:creationId xmlns:a16="http://schemas.microsoft.com/office/drawing/2014/main" id="{29289741-3E75-1954-3C2B-F5CFF6F2B34B}"/>
+                <a16:creationId xmlns:a16="http://schemas.microsoft.com/office/drawing/2014/main" id="{7EA40AB0-75FC-4F7F-41CA-DFBFAE1D8B6D}"/>
               </a:ext>
             </a:extLst>
           </p:cNvPr>
@@ -541,7 +541,7 @@
           <a:bodyPr/>
           <a:lstStyle/>
           <a:p>
-            <a:fld id="{EA8BC1D6-A548-4A62-A106-3BCC4D337BCD}" type="slidenum">
+            <a:fld id="{1F78B73D-BD89-4C29-A720-EEB8AC92D2C1}" type="slidenum">
               <a:rPr kumimoji="1" lang="ja-JP" altLang="en-US" smtClean="0"/>
               <a:t>‹#›</a:t>
             </a:fld>
@@ -552,7 +552,7 @@
     </p:spTree>
     <p:extLst>
       <p:ext uri="{BB962C8B-B14F-4D97-AF65-F5344CB8AC3E}">
-        <p14:creationId xmlns:p14="http://schemas.microsoft.com/office/powerpoint/2010/main" val="3459202891"/>
+        <p14:creationId xmlns:p14="http://schemas.microsoft.com/office/powerpoint/2010/main" val="73515938"/>
       </p:ext>
     </p:extLst>
   </p:cSld>
@@ -584,7 +584,7 @@
           <p:cNvPr id="2" name="縦書きタイトル 1">
             <a:extLst>
               <a:ext uri="{FF2B5EF4-FFF2-40B4-BE49-F238E27FC236}">
-                <a16:creationId xmlns:a16="http://schemas.microsoft.com/office/drawing/2014/main" id="{FB95B564-690C-6596-E82B-2F2DA6E3F357}"/>
+                <a16:creationId xmlns:a16="http://schemas.microsoft.com/office/drawing/2014/main" id="{9E9C0119-969E-F435-C009-E4AC85E9EDD4}"/>
               </a:ext>
             </a:extLst>
           </p:cNvPr>
@@ -617,7 +617,7 @@
           <p:cNvPr id="3" name="縦書きテキスト プレースホルダー 2">
             <a:extLst>
               <a:ext uri="{FF2B5EF4-FFF2-40B4-BE49-F238E27FC236}">
-                <a16:creationId xmlns:a16="http://schemas.microsoft.com/office/drawing/2014/main" id="{D32C0B6C-E161-BCAB-1346-8CC6F7F44092}"/>
+                <a16:creationId xmlns:a16="http://schemas.microsoft.com/office/drawing/2014/main" id="{16A786B0-BD56-CF32-F589-1D94BE404E6A}"/>
               </a:ext>
             </a:extLst>
           </p:cNvPr>
@@ -711,7 +711,7 @@
           <p:cNvPr id="4" name="日付プレースホルダー 3">
             <a:extLst>
               <a:ext uri="{FF2B5EF4-FFF2-40B4-BE49-F238E27FC236}">
-                <a16:creationId xmlns:a16="http://schemas.microsoft.com/office/drawing/2014/main" id="{DF3A4DB6-C11D-99F0-0A2B-0A1B3CECC77F}"/>
+                <a16:creationId xmlns:a16="http://schemas.microsoft.com/office/drawing/2014/main" id="{75EC25DF-035B-AEC1-AEA7-8466752F26CB}"/>
               </a:ext>
             </a:extLst>
           </p:cNvPr>
@@ -727,7 +727,7 @@
           <a:bodyPr/>
           <a:lstStyle/>
           <a:p>
-            <a:fld id="{47C164C1-C361-41F3-8408-E012A298061A}" type="datetimeFigureOut">
+            <a:fld id="{1BFF2664-D56C-4020-BDA7-6855D4114E19}" type="datetimeFigureOut">
               <a:rPr kumimoji="1" lang="ja-JP" altLang="en-US" smtClean="0"/>
               <a:t>2026/7/30</a:t>
             </a:fld>
@@ -740,7 +740,7 @@
           <p:cNvPr id="5" name="フッター プレースホルダー 4">
             <a:extLst>
               <a:ext uri="{FF2B5EF4-FFF2-40B4-BE49-F238E27FC236}">
-                <a16:creationId xmlns:a16="http://schemas.microsoft.com/office/drawing/2014/main" id="{9052931E-63F8-10DC-FA56-1941640916F0}"/>
+                <a16:creationId xmlns:a16="http://schemas.microsoft.com/office/drawing/2014/main" id="{D4195739-7D2B-75B9-2D1B-D269F7F16F92}"/>
               </a:ext>
             </a:extLst>
           </p:cNvPr>
@@ -765,7 +765,7 @@
           <p:cNvPr id="6" name="スライド番号プレースホルダー 5">
             <a:extLst>
               <a:ext uri="{FF2B5EF4-FFF2-40B4-BE49-F238E27FC236}">
-                <a16:creationId xmlns:a16="http://schemas.microsoft.com/office/drawing/2014/main" id="{C8294123-8578-275E-A02A-525F54945CB8}"/>
+                <a16:creationId xmlns:a16="http://schemas.microsoft.com/office/drawing/2014/main" id="{D0D8EC16-28F6-E46A-7167-510DDB61D7C9}"/>
               </a:ext>
             </a:extLst>
           </p:cNvPr>
@@ -781,7 +781,7 @@
           <a:bodyPr/>
           <a:lstStyle/>
           <a:p>
-            <a:fld id="{EA8BC1D6-A548-4A62-A106-3BCC4D337BCD}" type="slidenum">
+            <a:fld id="{1F78B73D-BD89-4C29-A720-EEB8AC92D2C1}" type="slidenum">
               <a:rPr kumimoji="1" lang="ja-JP" altLang="en-US" smtClean="0"/>
               <a:t>‹#›</a:t>
             </a:fld>
@@ -792,7 +792,7 @@
     </p:spTree>
     <p:extLst>
       <p:ext uri="{BB962C8B-B14F-4D97-AF65-F5344CB8AC3E}">
-        <p14:creationId xmlns:p14="http://schemas.microsoft.com/office/powerpoint/2010/main" val="487602519"/>
+        <p14:creationId xmlns:p14="http://schemas.microsoft.com/office/powerpoint/2010/main" val="3175527147"/>
       </p:ext>
     </p:extLst>
   </p:cSld>
@@ -824,7 +824,7 @@
           <p:cNvPr id="2" name="タイトル 1">
             <a:extLst>
               <a:ext uri="{FF2B5EF4-FFF2-40B4-BE49-F238E27FC236}">
-                <a16:creationId xmlns:a16="http://schemas.microsoft.com/office/drawing/2014/main" id="{DF226D64-CC6C-C3A8-B96D-DD366561B833}"/>
+                <a16:creationId xmlns:a16="http://schemas.microsoft.com/office/drawing/2014/main" id="{EC36B03E-5BFE-69C3-B07B-5EA17C0A1E78}"/>
               </a:ext>
             </a:extLst>
           </p:cNvPr>
@@ -852,7 +852,7 @@
           <p:cNvPr id="3" name="コンテンツ プレースホルダー 2">
             <a:extLst>
               <a:ext uri="{FF2B5EF4-FFF2-40B4-BE49-F238E27FC236}">
-                <a16:creationId xmlns:a16="http://schemas.microsoft.com/office/drawing/2014/main" id="{5B7E05E0-596B-949C-3700-153061A9A756}"/>
+                <a16:creationId xmlns:a16="http://schemas.microsoft.com/office/drawing/2014/main" id="{43051106-9C11-6602-08D1-F6C3D40AA890}"/>
               </a:ext>
             </a:extLst>
           </p:cNvPr>
@@ -941,7 +941,7 @@
           <p:cNvPr id="4" name="日付プレースホルダー 3">
             <a:extLst>
               <a:ext uri="{FF2B5EF4-FFF2-40B4-BE49-F238E27FC236}">
-                <a16:creationId xmlns:a16="http://schemas.microsoft.com/office/drawing/2014/main" id="{BE093FF8-3D75-0316-E2D9-A7CE79C3A778}"/>
+                <a16:creationId xmlns:a16="http://schemas.microsoft.com/office/drawing/2014/main" id="{149860AF-D45A-1E14-C664-719DAAC62C0A}"/>
               </a:ext>
             </a:extLst>
           </p:cNvPr>
@@ -957,7 +957,7 @@
           <a:bodyPr/>
           <a:lstStyle/>
           <a:p>
-            <a:fld id="{47C164C1-C361-41F3-8408-E012A298061A}" type="datetimeFigureOut">
+            <a:fld id="{1BFF2664-D56C-4020-BDA7-6855D4114E19}" type="datetimeFigureOut">
               <a:rPr kumimoji="1" lang="ja-JP" altLang="en-US" smtClean="0"/>
               <a:t>2026/7/30</a:t>
             </a:fld>
@@ -970,7 +970,7 @@
           <p:cNvPr id="5" name="フッター プレースホルダー 4">
             <a:extLst>
               <a:ext uri="{FF2B5EF4-FFF2-40B4-BE49-F238E27FC236}">
-                <a16:creationId xmlns:a16="http://schemas.microsoft.com/office/drawing/2014/main" id="{2C21E847-FAE1-B61E-28FA-B3D89A88B863}"/>
+                <a16:creationId xmlns:a16="http://schemas.microsoft.com/office/drawing/2014/main" id="{9ACEF30B-E676-E31C-A069-BD6A66639F0D}"/>
               </a:ext>
             </a:extLst>
           </p:cNvPr>
@@ -995,7 +995,7 @@
           <p:cNvPr id="6" name="スライド番号プレースホルダー 5">
             <a:extLst>
               <a:ext uri="{FF2B5EF4-FFF2-40B4-BE49-F238E27FC236}">
-                <a16:creationId xmlns:a16="http://schemas.microsoft.com/office/drawing/2014/main" id="{8B0D36B9-E9C1-C07A-5191-535AC487F620}"/>
+                <a16:creationId xmlns:a16="http://schemas.microsoft.com/office/drawing/2014/main" id="{2477A274-A4D6-A6E8-6153-F4FD8EC89CDF}"/>
               </a:ext>
             </a:extLst>
           </p:cNvPr>
@@ -1011,7 +1011,7 @@
           <a:bodyPr/>
           <a:lstStyle/>
           <a:p>
-            <a:fld id="{EA8BC1D6-A548-4A62-A106-3BCC4D337BCD}" type="slidenum">
+            <a:fld id="{1F78B73D-BD89-4C29-A720-EEB8AC92D2C1}" type="slidenum">
               <a:rPr kumimoji="1" lang="ja-JP" altLang="en-US" smtClean="0"/>
               <a:t>‹#›</a:t>
             </a:fld>
@@ -1022,7 +1022,7 @@
     </p:spTree>
     <p:extLst>
       <p:ext uri="{BB962C8B-B14F-4D97-AF65-F5344CB8AC3E}">
-        <p14:creationId xmlns:p14="http://schemas.microsoft.com/office/powerpoint/2010/main" val="1430680306"/>
+        <p14:creationId xmlns:p14="http://schemas.microsoft.com/office/powerpoint/2010/main" val="3484400875"/>
       </p:ext>
     </p:extLst>
   </p:cSld>
@@ -1054,7 +1054,7 @@
           <p:cNvPr id="2" name="タイトル 1">
             <a:extLst>
               <a:ext uri="{FF2B5EF4-FFF2-40B4-BE49-F238E27FC236}">
-                <a16:creationId xmlns:a16="http://schemas.microsoft.com/office/drawing/2014/main" id="{C949FF62-767F-76CE-1F47-104E05EBF4EA}"/>
+                <a16:creationId xmlns:a16="http://schemas.microsoft.com/office/drawing/2014/main" id="{0F7B3F13-8404-DDE8-5724-A97A01560F4F}"/>
               </a:ext>
             </a:extLst>
           </p:cNvPr>
@@ -1091,7 +1091,7 @@
           <p:cNvPr id="3" name="テキスト プレースホルダー 2">
             <a:extLst>
               <a:ext uri="{FF2B5EF4-FFF2-40B4-BE49-F238E27FC236}">
-                <a16:creationId xmlns:a16="http://schemas.microsoft.com/office/drawing/2014/main" id="{755FB1B2-200E-0503-A944-007D029FF3DC}"/>
+                <a16:creationId xmlns:a16="http://schemas.microsoft.com/office/drawing/2014/main" id="{D4C1AC0F-7F9D-EAF8-A008-650E1A044C73}"/>
               </a:ext>
             </a:extLst>
           </p:cNvPr>
@@ -1216,7 +1216,7 @@
           <p:cNvPr id="4" name="日付プレースホルダー 3">
             <a:extLst>
               <a:ext uri="{FF2B5EF4-FFF2-40B4-BE49-F238E27FC236}">
-                <a16:creationId xmlns:a16="http://schemas.microsoft.com/office/drawing/2014/main" id="{D3490110-BC5A-B4FC-EF94-EA041256EF4A}"/>
+                <a16:creationId xmlns:a16="http://schemas.microsoft.com/office/drawing/2014/main" id="{9E2CAFFD-3AA2-719E-435B-FC1AE8C5D455}"/>
               </a:ext>
             </a:extLst>
           </p:cNvPr>
@@ -1232,7 +1232,7 @@
           <a:bodyPr/>
           <a:lstStyle/>
           <a:p>
-            <a:fld id="{47C164C1-C361-41F3-8408-E012A298061A}" type="datetimeFigureOut">
+            <a:fld id="{1BFF2664-D56C-4020-BDA7-6855D4114E19}" type="datetimeFigureOut">
               <a:rPr kumimoji="1" lang="ja-JP" altLang="en-US" smtClean="0"/>
               <a:t>2026/7/30</a:t>
             </a:fld>
@@ -1245,7 +1245,7 @@
           <p:cNvPr id="5" name="フッター プレースホルダー 4">
             <a:extLst>
               <a:ext uri="{FF2B5EF4-FFF2-40B4-BE49-F238E27FC236}">
-                <a16:creationId xmlns:a16="http://schemas.microsoft.com/office/drawing/2014/main" id="{A781CB50-D879-59AB-201B-0044A7DD22A2}"/>
+                <a16:creationId xmlns:a16="http://schemas.microsoft.com/office/drawing/2014/main" id="{3012FCA7-CBA6-F118-B82A-818FE34145E8}"/>
               </a:ext>
             </a:extLst>
           </p:cNvPr>
@@ -1270,7 +1270,7 @@
           <p:cNvPr id="6" name="スライド番号プレースホルダー 5">
             <a:extLst>
               <a:ext uri="{FF2B5EF4-FFF2-40B4-BE49-F238E27FC236}">
-                <a16:creationId xmlns:a16="http://schemas.microsoft.com/office/drawing/2014/main" id="{16EF7E93-3B7E-88B7-A403-F4834FD6060C}"/>
+                <a16:creationId xmlns:a16="http://schemas.microsoft.com/office/drawing/2014/main" id="{88BF8F74-1D50-6689-1B9D-6B1B2358A5D5}"/>
               </a:ext>
             </a:extLst>
           </p:cNvPr>
@@ -1286,7 +1286,7 @@
           <a:bodyPr/>
           <a:lstStyle/>
           <a:p>
-            <a:fld id="{EA8BC1D6-A548-4A62-A106-3BCC4D337BCD}" type="slidenum">
+            <a:fld id="{1F78B73D-BD89-4C29-A720-EEB8AC92D2C1}" type="slidenum">
               <a:rPr kumimoji="1" lang="ja-JP" altLang="en-US" smtClean="0"/>
               <a:t>‹#›</a:t>
             </a:fld>
@@ -1297,7 +1297,7 @@
     </p:spTree>
     <p:extLst>
       <p:ext uri="{BB962C8B-B14F-4D97-AF65-F5344CB8AC3E}">
-        <p14:creationId xmlns:p14="http://schemas.microsoft.com/office/powerpoint/2010/main" val="1231810192"/>
+        <p14:creationId xmlns:p14="http://schemas.microsoft.com/office/powerpoint/2010/main" val="566822559"/>
       </p:ext>
     </p:extLst>
   </p:cSld>
@@ -1329,7 +1329,7 @@
           <p:cNvPr id="2" name="タイトル 1">
             <a:extLst>
               <a:ext uri="{FF2B5EF4-FFF2-40B4-BE49-F238E27FC236}">
-                <a16:creationId xmlns:a16="http://schemas.microsoft.com/office/drawing/2014/main" id="{F7C1850C-2547-1C79-47F3-C3FF0EA75849}"/>
+                <a16:creationId xmlns:a16="http://schemas.microsoft.com/office/drawing/2014/main" id="{38FE3D41-ACB8-24A3-EA80-8EFE3C8B3581}"/>
               </a:ext>
             </a:extLst>
           </p:cNvPr>
@@ -1357,7 +1357,7 @@
           <p:cNvPr id="3" name="コンテンツ プレースホルダー 2">
             <a:extLst>
               <a:ext uri="{FF2B5EF4-FFF2-40B4-BE49-F238E27FC236}">
-                <a16:creationId xmlns:a16="http://schemas.microsoft.com/office/drawing/2014/main" id="{C9FE7B65-B189-1FD0-29CE-9D46E723FA38}"/>
+                <a16:creationId xmlns:a16="http://schemas.microsoft.com/office/drawing/2014/main" id="{A0FA4C43-41C2-5C78-2B74-DC3B78570641}"/>
               </a:ext>
             </a:extLst>
           </p:cNvPr>
@@ -1451,7 +1451,7 @@
           <p:cNvPr id="4" name="コンテンツ プレースホルダー 3">
             <a:extLst>
               <a:ext uri="{FF2B5EF4-FFF2-40B4-BE49-F238E27FC236}">
-                <a16:creationId xmlns:a16="http://schemas.microsoft.com/office/drawing/2014/main" id="{D4ABE296-E087-B732-E7CF-FB2B65419863}"/>
+                <a16:creationId xmlns:a16="http://schemas.microsoft.com/office/drawing/2014/main" id="{54A0ECD0-AA09-F385-DF81-FBA42843406B}"/>
               </a:ext>
             </a:extLst>
           </p:cNvPr>
@@ -1545,7 +1545,7 @@
           <p:cNvPr id="5" name="日付プレースホルダー 4">
             <a:extLst>
               <a:ext uri="{FF2B5EF4-FFF2-40B4-BE49-F238E27FC236}">
-                <a16:creationId xmlns:a16="http://schemas.microsoft.com/office/drawing/2014/main" id="{2A948A7D-2261-5359-FC85-5F8AF90626B7}"/>
+                <a16:creationId xmlns:a16="http://schemas.microsoft.com/office/drawing/2014/main" id="{E39EE22E-6497-8834-D290-F37369E1C081}"/>
               </a:ext>
             </a:extLst>
           </p:cNvPr>
@@ -1561,7 +1561,7 @@
           <a:bodyPr/>
           <a:lstStyle/>
           <a:p>
-            <a:fld id="{47C164C1-C361-41F3-8408-E012A298061A}" type="datetimeFigureOut">
+            <a:fld id="{1BFF2664-D56C-4020-BDA7-6855D4114E19}" type="datetimeFigureOut">
               <a:rPr kumimoji="1" lang="ja-JP" altLang="en-US" smtClean="0"/>
               <a:t>2026/7/30</a:t>
             </a:fld>
@@ -1574,7 +1574,7 @@
           <p:cNvPr id="6" name="フッター プレースホルダー 5">
             <a:extLst>
               <a:ext uri="{FF2B5EF4-FFF2-40B4-BE49-F238E27FC236}">
-                <a16:creationId xmlns:a16="http://schemas.microsoft.com/office/drawing/2014/main" id="{CE3C37FC-142A-3606-E828-A83D747CF8A2}"/>
+                <a16:creationId xmlns:a16="http://schemas.microsoft.com/office/drawing/2014/main" id="{E0ABEF89-A848-FADD-4150-B8EAE5B03BDD}"/>
               </a:ext>
             </a:extLst>
           </p:cNvPr>
@@ -1599,7 +1599,7 @@
           <p:cNvPr id="7" name="スライド番号プレースホルダー 6">
             <a:extLst>
               <a:ext uri="{FF2B5EF4-FFF2-40B4-BE49-F238E27FC236}">
-                <a16:creationId xmlns:a16="http://schemas.microsoft.com/office/drawing/2014/main" id="{BAEA8891-9FD5-E2AC-B924-7479BDC1DB9E}"/>
+                <a16:creationId xmlns:a16="http://schemas.microsoft.com/office/drawing/2014/main" id="{87563A44-7E99-C477-1798-6619FAE05256}"/>
               </a:ext>
             </a:extLst>
           </p:cNvPr>
@@ -1615,7 +1615,7 @@
           <a:bodyPr/>
           <a:lstStyle/>
           <a:p>
-            <a:fld id="{EA8BC1D6-A548-4A62-A106-3BCC4D337BCD}" type="slidenum">
+            <a:fld id="{1F78B73D-BD89-4C29-A720-EEB8AC92D2C1}" type="slidenum">
               <a:rPr kumimoji="1" lang="ja-JP" altLang="en-US" smtClean="0"/>
               <a:t>‹#›</a:t>
             </a:fld>
@@ -1626,7 +1626,7 @@
     </p:spTree>
     <p:extLst>
       <p:ext uri="{BB962C8B-B14F-4D97-AF65-F5344CB8AC3E}">
-        <p14:creationId xmlns:p14="http://schemas.microsoft.com/office/powerpoint/2010/main" val="855745326"/>
+        <p14:creationId xmlns:p14="http://schemas.microsoft.com/office/powerpoint/2010/main" val="2696568697"/>
       </p:ext>
     </p:extLst>
   </p:cSld>
@@ -1658,7 +1658,7 @@
           <p:cNvPr id="2" name="タイトル 1">
             <a:extLst>
               <a:ext uri="{FF2B5EF4-FFF2-40B4-BE49-F238E27FC236}">
-                <a16:creationId xmlns:a16="http://schemas.microsoft.com/office/drawing/2014/main" id="{57F0246C-8BA1-0BB1-4667-68AE9DBE7610}"/>
+                <a16:creationId xmlns:a16="http://schemas.microsoft.com/office/drawing/2014/main" id="{EFDD0C32-3238-D59E-177F-46F1EC43C6FE}"/>
               </a:ext>
             </a:extLst>
           </p:cNvPr>
@@ -1691,7 +1691,7 @@
           <p:cNvPr id="3" name="テキスト プレースホルダー 2">
             <a:extLst>
               <a:ext uri="{FF2B5EF4-FFF2-40B4-BE49-F238E27FC236}">
-                <a16:creationId xmlns:a16="http://schemas.microsoft.com/office/drawing/2014/main" id="{02C09C79-AD87-CD8A-4698-AAA023E0A98C}"/>
+                <a16:creationId xmlns:a16="http://schemas.microsoft.com/office/drawing/2014/main" id="{98F2D452-3BD3-9C24-08A6-DA8E61D267D5}"/>
               </a:ext>
             </a:extLst>
           </p:cNvPr>
@@ -1762,7 +1762,7 @@
           <p:cNvPr id="4" name="コンテンツ プレースホルダー 3">
             <a:extLst>
               <a:ext uri="{FF2B5EF4-FFF2-40B4-BE49-F238E27FC236}">
-                <a16:creationId xmlns:a16="http://schemas.microsoft.com/office/drawing/2014/main" id="{1FE4825C-7554-77EB-E489-0E8B74425C92}"/>
+                <a16:creationId xmlns:a16="http://schemas.microsoft.com/office/drawing/2014/main" id="{3F05DE02-11FE-D2D0-39FD-3A865C203E99}"/>
               </a:ext>
             </a:extLst>
           </p:cNvPr>
@@ -1856,7 +1856,7 @@
           <p:cNvPr id="5" name="テキスト プレースホルダー 4">
             <a:extLst>
               <a:ext uri="{FF2B5EF4-FFF2-40B4-BE49-F238E27FC236}">
-                <a16:creationId xmlns:a16="http://schemas.microsoft.com/office/drawing/2014/main" id="{B831ED2A-5962-3A78-A53E-1162396CC6F9}"/>
+                <a16:creationId xmlns:a16="http://schemas.microsoft.com/office/drawing/2014/main" id="{6EBCB01F-AC31-9E71-DB66-BDE88B27152A}"/>
               </a:ext>
             </a:extLst>
           </p:cNvPr>
@@ -1927,7 +1927,7 @@
           <p:cNvPr id="6" name="コンテンツ プレースホルダー 5">
             <a:extLst>
               <a:ext uri="{FF2B5EF4-FFF2-40B4-BE49-F238E27FC236}">
-                <a16:creationId xmlns:a16="http://schemas.microsoft.com/office/drawing/2014/main" id="{F9F04CF7-DB16-AD7B-59ED-19EDED3197B2}"/>
+                <a16:creationId xmlns:a16="http://schemas.microsoft.com/office/drawing/2014/main" id="{EDC347C8-9C47-A75C-EA30-1CFEF4F76D4E}"/>
               </a:ext>
             </a:extLst>
           </p:cNvPr>
@@ -2021,7 +2021,7 @@
           <p:cNvPr id="7" name="日付プレースホルダー 6">
             <a:extLst>
               <a:ext uri="{FF2B5EF4-FFF2-40B4-BE49-F238E27FC236}">
-                <a16:creationId xmlns:a16="http://schemas.microsoft.com/office/drawing/2014/main" id="{D1DCDD96-0EF6-7DEE-9A6E-0C4ED1E13D85}"/>
+                <a16:creationId xmlns:a16="http://schemas.microsoft.com/office/drawing/2014/main" id="{A4BF4256-F560-13BF-E611-AFDD02153DC3}"/>
               </a:ext>
             </a:extLst>
           </p:cNvPr>
@@ -2037,7 +2037,7 @@
           <a:bodyPr/>
           <a:lstStyle/>
           <a:p>
-            <a:fld id="{47C164C1-C361-41F3-8408-E012A298061A}" type="datetimeFigureOut">
+            <a:fld id="{1BFF2664-D56C-4020-BDA7-6855D4114E19}" type="datetimeFigureOut">
               <a:rPr kumimoji="1" lang="ja-JP" altLang="en-US" smtClean="0"/>
               <a:t>2026/7/30</a:t>
             </a:fld>
@@ -2050,7 +2050,7 @@
           <p:cNvPr id="8" name="フッター プレースホルダー 7">
             <a:extLst>
               <a:ext uri="{FF2B5EF4-FFF2-40B4-BE49-F238E27FC236}">
-                <a16:creationId xmlns:a16="http://schemas.microsoft.com/office/drawing/2014/main" id="{26FF6644-4AB5-D3B1-C754-1F93ED2E9F26}"/>
+                <a16:creationId xmlns:a16="http://schemas.microsoft.com/office/drawing/2014/main" id="{B97B49BE-4A0A-29A8-6EA9-6F08AA4CD3DB}"/>
               </a:ext>
             </a:extLst>
           </p:cNvPr>
@@ -2075,7 +2075,7 @@
           <p:cNvPr id="9" name="スライド番号プレースホルダー 8">
             <a:extLst>
               <a:ext uri="{FF2B5EF4-FFF2-40B4-BE49-F238E27FC236}">
-                <a16:creationId xmlns:a16="http://schemas.microsoft.com/office/drawing/2014/main" id="{EEDB1667-BC4C-F3AA-D97A-B11239254008}"/>
+                <a16:creationId xmlns:a16="http://schemas.microsoft.com/office/drawing/2014/main" id="{E48FB8FD-587C-2C1D-59D8-0116D05439C0}"/>
               </a:ext>
             </a:extLst>
           </p:cNvPr>
@@ -2091,7 +2091,7 @@
           <a:bodyPr/>
           <a:lstStyle/>
           <a:p>
-            <a:fld id="{EA8BC1D6-A548-4A62-A106-3BCC4D337BCD}" type="slidenum">
+            <a:fld id="{1F78B73D-BD89-4C29-A720-EEB8AC92D2C1}" type="slidenum">
               <a:rPr kumimoji="1" lang="ja-JP" altLang="en-US" smtClean="0"/>
               <a:t>‹#›</a:t>
             </a:fld>
@@ -2102,7 +2102,7 @@
     </p:spTree>
     <p:extLst>
       <p:ext uri="{BB962C8B-B14F-4D97-AF65-F5344CB8AC3E}">
-        <p14:creationId xmlns:p14="http://schemas.microsoft.com/office/powerpoint/2010/main" val="3608300051"/>
+        <p14:creationId xmlns:p14="http://schemas.microsoft.com/office/powerpoint/2010/main" val="4189532022"/>
       </p:ext>
     </p:extLst>
   </p:cSld>
@@ -2134,7 +2134,7 @@
           <p:cNvPr id="2" name="タイトル 1">
             <a:extLst>
               <a:ext uri="{FF2B5EF4-FFF2-40B4-BE49-F238E27FC236}">
-                <a16:creationId xmlns:a16="http://schemas.microsoft.com/office/drawing/2014/main" id="{220640B5-A4FC-4ABC-B48F-02587771E291}"/>
+                <a16:creationId xmlns:a16="http://schemas.microsoft.com/office/drawing/2014/main" id="{CAFD9BA5-FEDE-E223-F88B-6896B1B2A106}"/>
               </a:ext>
             </a:extLst>
           </p:cNvPr>
@@ -2162,7 +2162,7 @@
           <p:cNvPr id="3" name="日付プレースホルダー 2">
             <a:extLst>
               <a:ext uri="{FF2B5EF4-FFF2-40B4-BE49-F238E27FC236}">
-                <a16:creationId xmlns:a16="http://schemas.microsoft.com/office/drawing/2014/main" id="{D254A2B0-0497-DD5D-E372-E509751D33F1}"/>
+                <a16:creationId xmlns:a16="http://schemas.microsoft.com/office/drawing/2014/main" id="{5858F749-1CBF-0280-968C-F1F7B220C66C}"/>
               </a:ext>
             </a:extLst>
           </p:cNvPr>
@@ -2178,7 +2178,7 @@
           <a:bodyPr/>
           <a:lstStyle/>
           <a:p>
-            <a:fld id="{47C164C1-C361-41F3-8408-E012A298061A}" type="datetimeFigureOut">
+            <a:fld id="{1BFF2664-D56C-4020-BDA7-6855D4114E19}" type="datetimeFigureOut">
               <a:rPr kumimoji="1" lang="ja-JP" altLang="en-US" smtClean="0"/>
               <a:t>2026/7/30</a:t>
             </a:fld>
@@ -2191,7 +2191,7 @@
           <p:cNvPr id="4" name="フッター プレースホルダー 3">
             <a:extLst>
               <a:ext uri="{FF2B5EF4-FFF2-40B4-BE49-F238E27FC236}">
-                <a16:creationId xmlns:a16="http://schemas.microsoft.com/office/drawing/2014/main" id="{92EE6C71-E9D8-2B9D-AE54-3DE71228C200}"/>
+                <a16:creationId xmlns:a16="http://schemas.microsoft.com/office/drawing/2014/main" id="{803756BD-486B-FCF3-A21F-7A898E12CCD3}"/>
               </a:ext>
             </a:extLst>
           </p:cNvPr>
@@ -2216,7 +2216,7 @@
           <p:cNvPr id="5" name="スライド番号プレースホルダー 4">
             <a:extLst>
               <a:ext uri="{FF2B5EF4-FFF2-40B4-BE49-F238E27FC236}">
-                <a16:creationId xmlns:a16="http://schemas.microsoft.com/office/drawing/2014/main" id="{996DBE80-A2DD-C66A-9441-04F74602E78D}"/>
+                <a16:creationId xmlns:a16="http://schemas.microsoft.com/office/drawing/2014/main" id="{BF455162-25BA-3D71-A494-D99F856D6168}"/>
               </a:ext>
             </a:extLst>
           </p:cNvPr>
@@ -2232,7 +2232,7 @@
           <a:bodyPr/>
           <a:lstStyle/>
           <a:p>
-            <a:fld id="{EA8BC1D6-A548-4A62-A106-3BCC4D337BCD}" type="slidenum">
+            <a:fld id="{1F78B73D-BD89-4C29-A720-EEB8AC92D2C1}" type="slidenum">
               <a:rPr kumimoji="1" lang="ja-JP" altLang="en-US" smtClean="0"/>
               <a:t>‹#›</a:t>
             </a:fld>
@@ -2243,7 +2243,7 @@
     </p:spTree>
     <p:extLst>
       <p:ext uri="{BB962C8B-B14F-4D97-AF65-F5344CB8AC3E}">
-        <p14:creationId xmlns:p14="http://schemas.microsoft.com/office/powerpoint/2010/main" val="768362451"/>
+        <p14:creationId xmlns:p14="http://schemas.microsoft.com/office/powerpoint/2010/main" val="2843054494"/>
       </p:ext>
     </p:extLst>
   </p:cSld>
@@ -2275,7 +2275,7 @@
           <p:cNvPr id="2" name="日付プレースホルダー 1">
             <a:extLst>
               <a:ext uri="{FF2B5EF4-FFF2-40B4-BE49-F238E27FC236}">
-                <a16:creationId xmlns:a16="http://schemas.microsoft.com/office/drawing/2014/main" id="{67DFE859-7F02-2131-42AA-CE2E478AB0F8}"/>
+                <a16:creationId xmlns:a16="http://schemas.microsoft.com/office/drawing/2014/main" id="{E50D7296-FCF8-342C-DC90-5DE759F311BA}"/>
               </a:ext>
             </a:extLst>
           </p:cNvPr>
@@ -2291,7 +2291,7 @@
           <a:bodyPr/>
           <a:lstStyle/>
           <a:p>
-            <a:fld id="{47C164C1-C361-41F3-8408-E012A298061A}" type="datetimeFigureOut">
+            <a:fld id="{1BFF2664-D56C-4020-BDA7-6855D4114E19}" type="datetimeFigureOut">
               <a:rPr kumimoji="1" lang="ja-JP" altLang="en-US" smtClean="0"/>
               <a:t>2026/7/30</a:t>
             </a:fld>
@@ -2304,7 +2304,7 @@
           <p:cNvPr id="3" name="フッター プレースホルダー 2">
             <a:extLst>
               <a:ext uri="{FF2B5EF4-FFF2-40B4-BE49-F238E27FC236}">
-                <a16:creationId xmlns:a16="http://schemas.microsoft.com/office/drawing/2014/main" id="{4A978B4D-2F9B-DE3E-45A2-5AF79181D9D1}"/>
+                <a16:creationId xmlns:a16="http://schemas.microsoft.com/office/drawing/2014/main" id="{2A3FDB2E-9B92-380C-56D0-A2A23907A1A3}"/>
               </a:ext>
             </a:extLst>
           </p:cNvPr>
@@ -2329,7 +2329,7 @@
           <p:cNvPr id="4" name="スライド番号プレースホルダー 3">
             <a:extLst>
               <a:ext uri="{FF2B5EF4-FFF2-40B4-BE49-F238E27FC236}">
-                <a16:creationId xmlns:a16="http://schemas.microsoft.com/office/drawing/2014/main" id="{6A6B38E3-C8DE-76C0-3BC6-F91AC46D0CA2}"/>
+                <a16:creationId xmlns:a16="http://schemas.microsoft.com/office/drawing/2014/main" id="{007FA66C-059F-C78C-CC06-78D4DB12D6B9}"/>
               </a:ext>
             </a:extLst>
           </p:cNvPr>
@@ -2345,7 +2345,7 @@
           <a:bodyPr/>
           <a:lstStyle/>
           <a:p>
-            <a:fld id="{EA8BC1D6-A548-4A62-A106-3BCC4D337BCD}" type="slidenum">
+            <a:fld id="{1F78B73D-BD89-4C29-A720-EEB8AC92D2C1}" type="slidenum">
               <a:rPr kumimoji="1" lang="ja-JP" altLang="en-US" smtClean="0"/>
               <a:t>‹#›</a:t>
             </a:fld>
@@ -2356,7 +2356,7 @@
     </p:spTree>
     <p:extLst>
       <p:ext uri="{BB962C8B-B14F-4D97-AF65-F5344CB8AC3E}">
-        <p14:creationId xmlns:p14="http://schemas.microsoft.com/office/powerpoint/2010/main" val="1049609761"/>
+        <p14:creationId xmlns:p14="http://schemas.microsoft.com/office/powerpoint/2010/main" val="2451456938"/>
       </p:ext>
     </p:extLst>
   </p:cSld>
@@ -2388,7 +2388,7 @@
           <p:cNvPr id="2" name="タイトル 1">
             <a:extLst>
               <a:ext uri="{FF2B5EF4-FFF2-40B4-BE49-F238E27FC236}">
-                <a16:creationId xmlns:a16="http://schemas.microsoft.com/office/drawing/2014/main" id="{624D3B67-F5D7-4716-E4DF-B9426C921869}"/>
+                <a16:creationId xmlns:a16="http://schemas.microsoft.com/office/drawing/2014/main" id="{AAF01568-7914-3A70-3011-9EF07C19BA28}"/>
               </a:ext>
             </a:extLst>
           </p:cNvPr>
@@ -2425,7 +2425,7 @@
           <p:cNvPr id="3" name="コンテンツ プレースホルダー 2">
             <a:extLst>
               <a:ext uri="{FF2B5EF4-FFF2-40B4-BE49-F238E27FC236}">
-                <a16:creationId xmlns:a16="http://schemas.microsoft.com/office/drawing/2014/main" id="{A33FA83B-EB60-7B7F-F20F-263B1541E806}"/>
+                <a16:creationId xmlns:a16="http://schemas.microsoft.com/office/drawing/2014/main" id="{1FF614E3-365F-FA64-FBF4-4E8A50E994BC}"/>
               </a:ext>
             </a:extLst>
           </p:cNvPr>
@@ -2547,7 +2547,7 @@
           <p:cNvPr id="4" name="テキスト プレースホルダー 3">
             <a:extLst>
               <a:ext uri="{FF2B5EF4-FFF2-40B4-BE49-F238E27FC236}">
-                <a16:creationId xmlns:a16="http://schemas.microsoft.com/office/drawing/2014/main" id="{0ED902EA-E9E7-4A14-B6AA-B2D8CC0535A7}"/>
+                <a16:creationId xmlns:a16="http://schemas.microsoft.com/office/drawing/2014/main" id="{928304BD-25A9-E19B-8F08-FA89BF1604FD}"/>
               </a:ext>
             </a:extLst>
           </p:cNvPr>
@@ -2618,7 +2618,7 @@
           <p:cNvPr id="5" name="日付プレースホルダー 4">
             <a:extLst>
               <a:ext uri="{FF2B5EF4-FFF2-40B4-BE49-F238E27FC236}">
-                <a16:creationId xmlns:a16="http://schemas.microsoft.com/office/drawing/2014/main" id="{52D0F3BD-C98E-FC9A-BFF7-9A0E26AFF6FD}"/>
+                <a16:creationId xmlns:a16="http://schemas.microsoft.com/office/drawing/2014/main" id="{BF755B20-BF32-8451-184C-0A280AEB1558}"/>
               </a:ext>
             </a:extLst>
           </p:cNvPr>
@@ -2634,7 +2634,7 @@
           <a:bodyPr/>
           <a:lstStyle/>
           <a:p>
-            <a:fld id="{47C164C1-C361-41F3-8408-E012A298061A}" type="datetimeFigureOut">
+            <a:fld id="{1BFF2664-D56C-4020-BDA7-6855D4114E19}" type="datetimeFigureOut">
               <a:rPr kumimoji="1" lang="ja-JP" altLang="en-US" smtClean="0"/>
               <a:t>2026/7/30</a:t>
             </a:fld>
@@ -2647,7 +2647,7 @@
           <p:cNvPr id="6" name="フッター プレースホルダー 5">
             <a:extLst>
               <a:ext uri="{FF2B5EF4-FFF2-40B4-BE49-F238E27FC236}">
-                <a16:creationId xmlns:a16="http://schemas.microsoft.com/office/drawing/2014/main" id="{3C62CDAD-7B28-355C-9D85-A1D247B29B76}"/>
+                <a16:creationId xmlns:a16="http://schemas.microsoft.com/office/drawing/2014/main" id="{C06E5B22-E35B-4006-DA1D-ACDE22E4A1DF}"/>
               </a:ext>
             </a:extLst>
           </p:cNvPr>
@@ -2672,7 +2672,7 @@
           <p:cNvPr id="7" name="スライド番号プレースホルダー 6">
             <a:extLst>
               <a:ext uri="{FF2B5EF4-FFF2-40B4-BE49-F238E27FC236}">
-                <a16:creationId xmlns:a16="http://schemas.microsoft.com/office/drawing/2014/main" id="{90ED95B1-7F69-13E5-3C3B-D4FA8AA16E37}"/>
+                <a16:creationId xmlns:a16="http://schemas.microsoft.com/office/drawing/2014/main" id="{2411BA1F-0427-E7B9-358D-A95E724B908F}"/>
               </a:ext>
             </a:extLst>
           </p:cNvPr>
@@ -2688,7 +2688,7 @@
           <a:bodyPr/>
           <a:lstStyle/>
           <a:p>
-            <a:fld id="{EA8BC1D6-A548-4A62-A106-3BCC4D337BCD}" type="slidenum">
+            <a:fld id="{1F78B73D-BD89-4C29-A720-EEB8AC92D2C1}" type="slidenum">
               <a:rPr kumimoji="1" lang="ja-JP" altLang="en-US" smtClean="0"/>
               <a:t>‹#›</a:t>
             </a:fld>
@@ -2699,7 +2699,7 @@
     </p:spTree>
     <p:extLst>
       <p:ext uri="{BB962C8B-B14F-4D97-AF65-F5344CB8AC3E}">
-        <p14:creationId xmlns:p14="http://schemas.microsoft.com/office/powerpoint/2010/main" val="3390200499"/>
+        <p14:creationId xmlns:p14="http://schemas.microsoft.com/office/powerpoint/2010/main" val="2410305528"/>
       </p:ext>
     </p:extLst>
   </p:cSld>
@@ -2731,7 +2731,7 @@
           <p:cNvPr id="2" name="タイトル 1">
             <a:extLst>
               <a:ext uri="{FF2B5EF4-FFF2-40B4-BE49-F238E27FC236}">
-                <a16:creationId xmlns:a16="http://schemas.microsoft.com/office/drawing/2014/main" id="{B5750D9E-4198-F66D-35C4-9631B2EFB9F8}"/>
+                <a16:creationId xmlns:a16="http://schemas.microsoft.com/office/drawing/2014/main" id="{15B436A9-2341-F7F4-5F12-92F7A6DBED07}"/>
               </a:ext>
             </a:extLst>
           </p:cNvPr>
@@ -2768,7 +2768,7 @@
           <p:cNvPr id="3" name="図プレースホルダー 2">
             <a:extLst>
               <a:ext uri="{FF2B5EF4-FFF2-40B4-BE49-F238E27FC236}">
-                <a16:creationId xmlns:a16="http://schemas.microsoft.com/office/drawing/2014/main" id="{8A2594A9-99FD-8BF2-B1EE-2F3E452956F3}"/>
+                <a16:creationId xmlns:a16="http://schemas.microsoft.com/office/drawing/2014/main" id="{C1786CBF-8BAA-5A98-61FB-C6EDFA5473BE}"/>
               </a:ext>
             </a:extLst>
           </p:cNvPr>
@@ -2835,7 +2835,7 @@
           <p:cNvPr id="4" name="テキスト プレースホルダー 3">
             <a:extLst>
               <a:ext uri="{FF2B5EF4-FFF2-40B4-BE49-F238E27FC236}">
-                <a16:creationId xmlns:a16="http://schemas.microsoft.com/office/drawing/2014/main" id="{3D5E98F1-E7F4-A868-11DC-FDA17B67F0D5}"/>
+                <a16:creationId xmlns:a16="http://schemas.microsoft.com/office/drawing/2014/main" id="{D307249D-7D54-E734-2950-86DF6243AC23}"/>
               </a:ext>
             </a:extLst>
           </p:cNvPr>
@@ -2906,7 +2906,7 @@
           <p:cNvPr id="5" name="日付プレースホルダー 4">
             <a:extLst>
               <a:ext uri="{FF2B5EF4-FFF2-40B4-BE49-F238E27FC236}">
-                <a16:creationId xmlns:a16="http://schemas.microsoft.com/office/drawing/2014/main" id="{566C179D-76D0-ACBB-DD11-6F51AFFBFB58}"/>
+                <a16:creationId xmlns:a16="http://schemas.microsoft.com/office/drawing/2014/main" id="{DE174B56-447B-96D7-51E1-DED06A4770AF}"/>
               </a:ext>
             </a:extLst>
           </p:cNvPr>
@@ -2922,7 +2922,7 @@
           <a:bodyPr/>
           <a:lstStyle/>
           <a:p>
-            <a:fld id="{47C164C1-C361-41F3-8408-E012A298061A}" type="datetimeFigureOut">
+            <a:fld id="{1BFF2664-D56C-4020-BDA7-6855D4114E19}" type="datetimeFigureOut">
               <a:rPr kumimoji="1" lang="ja-JP" altLang="en-US" smtClean="0"/>
               <a:t>2026/7/30</a:t>
             </a:fld>
@@ -2935,7 +2935,7 @@
           <p:cNvPr id="6" name="フッター プレースホルダー 5">
             <a:extLst>
               <a:ext uri="{FF2B5EF4-FFF2-40B4-BE49-F238E27FC236}">
-                <a16:creationId xmlns:a16="http://schemas.microsoft.com/office/drawing/2014/main" id="{C88F7B5F-769C-B9E6-EFBF-7F0C576D413C}"/>
+                <a16:creationId xmlns:a16="http://schemas.microsoft.com/office/drawing/2014/main" id="{5AA87D78-EE38-690D-B4AA-983BBB7FFF68}"/>
               </a:ext>
             </a:extLst>
           </p:cNvPr>
@@ -2960,7 +2960,7 @@
           <p:cNvPr id="7" name="スライド番号プレースホルダー 6">
             <a:extLst>
               <a:ext uri="{FF2B5EF4-FFF2-40B4-BE49-F238E27FC236}">
-                <a16:creationId xmlns:a16="http://schemas.microsoft.com/office/drawing/2014/main" id="{4262AB66-F321-69D9-8E5E-AD2F11607BC1}"/>
+                <a16:creationId xmlns:a16="http://schemas.microsoft.com/office/drawing/2014/main" id="{9417B73B-692E-0D16-67C4-2EE6D154E8C5}"/>
               </a:ext>
             </a:extLst>
           </p:cNvPr>
@@ -2976,7 +2976,7 @@
           <a:bodyPr/>
           <a:lstStyle/>
           <a:p>
-            <a:fld id="{EA8BC1D6-A548-4A62-A106-3BCC4D337BCD}" type="slidenum">
+            <a:fld id="{1F78B73D-BD89-4C29-A720-EEB8AC92D2C1}" type="slidenum">
               <a:rPr kumimoji="1" lang="ja-JP" altLang="en-US" smtClean="0"/>
               <a:t>‹#›</a:t>
             </a:fld>
@@ -2987,7 +2987,7 @@
     </p:spTree>
     <p:extLst>
       <p:ext uri="{BB962C8B-B14F-4D97-AF65-F5344CB8AC3E}">
-        <p14:creationId xmlns:p14="http://schemas.microsoft.com/office/powerpoint/2010/main" val="1712210448"/>
+        <p14:creationId xmlns:p14="http://schemas.microsoft.com/office/powerpoint/2010/main" val="2537703607"/>
       </p:ext>
     </p:extLst>
   </p:cSld>
@@ -3024,7 +3024,7 @@
           <p:cNvPr id="2" name="タイトル プレースホルダー 1">
             <a:extLst>
               <a:ext uri="{FF2B5EF4-FFF2-40B4-BE49-F238E27FC236}">
-                <a16:creationId xmlns:a16="http://schemas.microsoft.com/office/drawing/2014/main" id="{F4EA5CE4-1E6E-FF3A-7F0D-C1D84618FDC7}"/>
+                <a16:creationId xmlns:a16="http://schemas.microsoft.com/office/drawing/2014/main" id="{1920298A-67C3-B8D4-6C73-513D2A3E8E19}"/>
               </a:ext>
             </a:extLst>
           </p:cNvPr>
@@ -3062,7 +3062,7 @@
           <p:cNvPr id="3" name="テキスト プレースホルダー 2">
             <a:extLst>
               <a:ext uri="{FF2B5EF4-FFF2-40B4-BE49-F238E27FC236}">
-                <a16:creationId xmlns:a16="http://schemas.microsoft.com/office/drawing/2014/main" id="{68EF3D6B-A1AC-087B-E6CD-8E2B1E0C504E}"/>
+                <a16:creationId xmlns:a16="http://schemas.microsoft.com/office/drawing/2014/main" id="{9373756C-4AF6-07E7-D2ED-6CD67F9A9260}"/>
               </a:ext>
             </a:extLst>
           </p:cNvPr>
@@ -3161,7 +3161,7 @@
           <p:cNvPr id="4" name="日付プレースホルダー 3">
             <a:extLst>
               <a:ext uri="{FF2B5EF4-FFF2-40B4-BE49-F238E27FC236}">
-                <a16:creationId xmlns:a16="http://schemas.microsoft.com/office/drawing/2014/main" id="{49825FF2-7D94-252E-471D-61FF911BA78A}"/>
+                <a16:creationId xmlns:a16="http://schemas.microsoft.com/office/drawing/2014/main" id="{9BF89B03-D109-17A1-D275-6953EE9B0D43}"/>
               </a:ext>
             </a:extLst>
           </p:cNvPr>
@@ -3195,7 +3195,7 @@
             </a:lvl1pPr>
           </a:lstStyle>
           <a:p>
-            <a:fld id="{47C164C1-C361-41F3-8408-E012A298061A}" type="datetimeFigureOut">
+            <a:fld id="{1BFF2664-D56C-4020-BDA7-6855D4114E19}" type="datetimeFigureOut">
               <a:rPr kumimoji="1" lang="ja-JP" altLang="en-US" smtClean="0"/>
               <a:t>2026/7/30</a:t>
             </a:fld>
@@ -3208,7 +3208,7 @@
           <p:cNvPr id="5" name="フッター プレースホルダー 4">
             <a:extLst>
               <a:ext uri="{FF2B5EF4-FFF2-40B4-BE49-F238E27FC236}">
-                <a16:creationId xmlns:a16="http://schemas.microsoft.com/office/drawing/2014/main" id="{1E30F22D-E9D5-B6EF-D678-F251E46667CA}"/>
+                <a16:creationId xmlns:a16="http://schemas.microsoft.com/office/drawing/2014/main" id="{57159F71-0AA5-0670-E7B0-D42721FCE3D1}"/>
               </a:ext>
             </a:extLst>
           </p:cNvPr>
@@ -3251,7 +3251,7 @@
           <p:cNvPr id="6" name="スライド番号プレースホルダー 5">
             <a:extLst>
               <a:ext uri="{FF2B5EF4-FFF2-40B4-BE49-F238E27FC236}">
-                <a16:creationId xmlns:a16="http://schemas.microsoft.com/office/drawing/2014/main" id="{B0BBF052-0E82-AF95-5B2B-5043B654130B}"/>
+                <a16:creationId xmlns:a16="http://schemas.microsoft.com/office/drawing/2014/main" id="{0BCE4222-3F7E-E8E1-8BCC-21A3C91C86C1}"/>
               </a:ext>
             </a:extLst>
           </p:cNvPr>
@@ -3285,7 +3285,7 @@
             </a:lvl1pPr>
           </a:lstStyle>
           <a:p>
-            <a:fld id="{EA8BC1D6-A548-4A62-A106-3BCC4D337BCD}" type="slidenum">
+            <a:fld id="{1F78B73D-BD89-4C29-A720-EEB8AC92D2C1}" type="slidenum">
               <a:rPr kumimoji="1" lang="ja-JP" altLang="en-US" smtClean="0"/>
               <a:t>‹#›</a:t>
             </a:fld>
@@ -3296,7 +3296,7 @@
     </p:spTree>
     <p:extLst>
       <p:ext uri="{BB962C8B-B14F-4D97-AF65-F5344CB8AC3E}">
-        <p14:creationId xmlns:p14="http://schemas.microsoft.com/office/powerpoint/2010/main" val="289489277"/>
+        <p14:creationId xmlns:p14="http://schemas.microsoft.com/office/powerpoint/2010/main" val="3286078635"/>
       </p:ext>
     </p:extLst>
   </p:cSld>
@@ -3619,7 +3619,7 @@
           <p:cNvPr id="2" name="テキスト ボックス 1">
             <a:extLst>
               <a:ext uri="{FF2B5EF4-FFF2-40B4-BE49-F238E27FC236}">
-                <a16:creationId xmlns:a16="http://schemas.microsoft.com/office/drawing/2014/main" id="{3A36B50D-603E-6275-6112-2DAC99D3EFF8}"/>
+                <a16:creationId xmlns:a16="http://schemas.microsoft.com/office/drawing/2014/main" id="{7DF292A5-594B-2544-2A2E-D71A3DA881C4}"/>
               </a:ext>
             </a:extLst>
           </p:cNvPr>
@@ -3665,7 +3665,7 @@
           <p:cNvPr id="3" name="テキスト ボックス 2">
             <a:extLst>
               <a:ext uri="{FF2B5EF4-FFF2-40B4-BE49-F238E27FC236}">
-                <a16:creationId xmlns:a16="http://schemas.microsoft.com/office/drawing/2014/main" id="{A5AEFD37-F808-E4EB-D8B0-B9699A3CFF98}"/>
+                <a16:creationId xmlns:a16="http://schemas.microsoft.com/office/drawing/2014/main" id="{07F6449D-4F94-58B0-8E91-15F6E8A7487F}"/>
               </a:ext>
             </a:extLst>
           </p:cNvPr>
@@ -3714,7 +3714,7 @@
           <p:cNvPr id="4" name="テキスト ボックス 3">
             <a:extLst>
               <a:ext uri="{FF2B5EF4-FFF2-40B4-BE49-F238E27FC236}">
-                <a16:creationId xmlns:a16="http://schemas.microsoft.com/office/drawing/2014/main" id="{BF138C59-7902-CC40-996E-59B969D5256F}"/>
+                <a16:creationId xmlns:a16="http://schemas.microsoft.com/office/drawing/2014/main" id="{92D4B0A5-C6A9-6BDB-3E02-626C0351749D}"/>
               </a:ext>
             </a:extLst>
           </p:cNvPr>
@@ -3754,7 +3754,7 @@
           <p:cNvPr id="5" name="テキスト ボックス 4">
             <a:extLst>
               <a:ext uri="{FF2B5EF4-FFF2-40B4-BE49-F238E27FC236}">
-                <a16:creationId xmlns:a16="http://schemas.microsoft.com/office/drawing/2014/main" id="{8D056817-F581-5AD0-E45B-E8E2571D372B}"/>
+                <a16:creationId xmlns:a16="http://schemas.microsoft.com/office/drawing/2014/main" id="{06EA49AD-08D2-3152-4A9F-9E6863011D99}"/>
               </a:ext>
             </a:extLst>
           </p:cNvPr>
@@ -3801,7 +3801,7 @@
             <a:hlinkClick r:id="" action="ppaction://media"/>
             <a:extLst>
               <a:ext uri="{FF2B5EF4-FFF2-40B4-BE49-F238E27FC236}">
-                <a16:creationId xmlns:a16="http://schemas.microsoft.com/office/drawing/2014/main" id="{9F3F6A4F-05A3-3E68-ADCF-8B4E672FB164}"/>
+                <a16:creationId xmlns:a16="http://schemas.microsoft.com/office/drawing/2014/main" id="{0E592825-7BF7-39FB-36EC-1F524F15E172}"/>
               </a:ext>
             </a:extLst>
           </p:cNvPr>
@@ -3836,7 +3836,7 @@
     </p:spTree>
     <p:extLst>
       <p:ext uri="{BB962C8B-B14F-4D97-AF65-F5344CB8AC3E}">
-        <p14:creationId xmlns:p14="http://schemas.microsoft.com/office/powerpoint/2010/main" val="1715005607"/>
+        <p14:creationId xmlns:p14="http://schemas.microsoft.com/office/powerpoint/2010/main" val="2925352652"/>
       </p:ext>
     </p:extLst>
   </p:cSld>
@@ -3960,7 +3960,7 @@
           <p:cNvPr id="2" name="テキスト ボックス 1">
             <a:extLst>
               <a:ext uri="{FF2B5EF4-FFF2-40B4-BE49-F238E27FC236}">
-                <a16:creationId xmlns:a16="http://schemas.microsoft.com/office/drawing/2014/main" id="{9D188DC2-71A0-8E81-3DBD-C960ADD5107E}"/>
+                <a16:creationId xmlns:a16="http://schemas.microsoft.com/office/drawing/2014/main" id="{D59CDC24-1535-C8BC-39AD-F263CDE3860E}"/>
               </a:ext>
             </a:extLst>
           </p:cNvPr>
@@ -4006,7 +4006,7 @@
           <p:cNvPr id="3" name="テキスト ボックス 2">
             <a:extLst>
               <a:ext uri="{FF2B5EF4-FFF2-40B4-BE49-F238E27FC236}">
-                <a16:creationId xmlns:a16="http://schemas.microsoft.com/office/drawing/2014/main" id="{E60CF040-B647-8751-41FE-700134C9C8D7}"/>
+                <a16:creationId xmlns:a16="http://schemas.microsoft.com/office/drawing/2014/main" id="{F56EDE9B-CC84-2C9C-A29E-26FAD6631534}"/>
               </a:ext>
             </a:extLst>
           </p:cNvPr>
@@ -4046,7 +4046,7 @@
           <p:cNvPr id="4" name="テキスト ボックス 3">
             <a:extLst>
               <a:ext uri="{FF2B5EF4-FFF2-40B4-BE49-F238E27FC236}">
-                <a16:creationId xmlns:a16="http://schemas.microsoft.com/office/drawing/2014/main" id="{C73C28DA-BCA1-C353-8BD5-486209F920F0}"/>
+                <a16:creationId xmlns:a16="http://schemas.microsoft.com/office/drawing/2014/main" id="{DD5FEEA7-F33A-213E-F81D-74B95BC76138}"/>
               </a:ext>
             </a:extLst>
           </p:cNvPr>
@@ -4086,7 +4086,7 @@
           <p:cNvPr id="5" name="テキスト ボックス 4">
             <a:extLst>
               <a:ext uri="{FF2B5EF4-FFF2-40B4-BE49-F238E27FC236}">
-                <a16:creationId xmlns:a16="http://schemas.microsoft.com/office/drawing/2014/main" id="{BA08E54A-D1F8-9910-A86E-8D6ED561FE31}"/>
+                <a16:creationId xmlns:a16="http://schemas.microsoft.com/office/drawing/2014/main" id="{D0EE4C01-A109-E066-8370-0D3B7811BA22}"/>
               </a:ext>
             </a:extLst>
           </p:cNvPr>
@@ -4133,7 +4133,7 @@
             <a:hlinkClick r:id="" action="ppaction://media"/>
             <a:extLst>
               <a:ext uri="{FF2B5EF4-FFF2-40B4-BE49-F238E27FC236}">
-                <a16:creationId xmlns:a16="http://schemas.microsoft.com/office/drawing/2014/main" id="{A7706B0F-77E0-85B3-8B07-B1C1F6370312}"/>
+                <a16:creationId xmlns:a16="http://schemas.microsoft.com/office/drawing/2014/main" id="{A4ACE157-C3D0-D968-62E2-92138B96D0C2}"/>
               </a:ext>
             </a:extLst>
           </p:cNvPr>
@@ -4168,7 +4168,7 @@
     </p:spTree>
     <p:extLst>
       <p:ext uri="{BB962C8B-B14F-4D97-AF65-F5344CB8AC3E}">
-        <p14:creationId xmlns:p14="http://schemas.microsoft.com/office/powerpoint/2010/main" val="350185405"/>
+        <p14:creationId xmlns:p14="http://schemas.microsoft.com/office/powerpoint/2010/main" val="1996780474"/>
       </p:ext>
     </p:extLst>
   </p:cSld>
@@ -4292,7 +4292,7 @@
           <p:cNvPr id="2" name="テキスト ボックス 1">
             <a:extLst>
               <a:ext uri="{FF2B5EF4-FFF2-40B4-BE49-F238E27FC236}">
-                <a16:creationId xmlns:a16="http://schemas.microsoft.com/office/drawing/2014/main" id="{7098FD13-77A3-C816-CC96-89FA84758E03}"/>
+                <a16:creationId xmlns:a16="http://schemas.microsoft.com/office/drawing/2014/main" id="{E459A274-2520-4002-4EDB-E28CF9A649CB}"/>
               </a:ext>
             </a:extLst>
           </p:cNvPr>
@@ -4338,7 +4338,7 @@
           <p:cNvPr id="3" name="テキスト ボックス 2">
             <a:extLst>
               <a:ext uri="{FF2B5EF4-FFF2-40B4-BE49-F238E27FC236}">
-                <a16:creationId xmlns:a16="http://schemas.microsoft.com/office/drawing/2014/main" id="{C52825C9-F5DD-2F9A-0E07-07503A485579}"/>
+                <a16:creationId xmlns:a16="http://schemas.microsoft.com/office/drawing/2014/main" id="{65D1DF5F-C935-A1BE-16C2-282DAF4F4C09}"/>
               </a:ext>
             </a:extLst>
           </p:cNvPr>
@@ -4378,7 +4378,7 @@
           <p:cNvPr id="4" name="テキスト ボックス 3">
             <a:extLst>
               <a:ext uri="{FF2B5EF4-FFF2-40B4-BE49-F238E27FC236}">
-                <a16:creationId xmlns:a16="http://schemas.microsoft.com/office/drawing/2014/main" id="{BAF2229B-15F2-981C-601C-5DD555E1E62D}"/>
+                <a16:creationId xmlns:a16="http://schemas.microsoft.com/office/drawing/2014/main" id="{AF438B95-C9C9-5A1E-E643-89365D0AA974}"/>
               </a:ext>
             </a:extLst>
           </p:cNvPr>
@@ -4473,7 +4473,7 @@
           <p:cNvPr id="5" name="テキスト ボックス 4">
             <a:extLst>
               <a:ext uri="{FF2B5EF4-FFF2-40B4-BE49-F238E27FC236}">
-                <a16:creationId xmlns:a16="http://schemas.microsoft.com/office/drawing/2014/main" id="{D0F0C3D5-0833-C27C-54B9-F0E6991BDFA9}"/>
+                <a16:creationId xmlns:a16="http://schemas.microsoft.com/office/drawing/2014/main" id="{74B8AEB2-D594-F668-3E93-3DFA36ED631F}"/>
               </a:ext>
             </a:extLst>
           </p:cNvPr>
@@ -4520,7 +4520,7 @@
             <a:hlinkClick r:id="" action="ppaction://media"/>
             <a:extLst>
               <a:ext uri="{FF2B5EF4-FFF2-40B4-BE49-F238E27FC236}">
-                <a16:creationId xmlns:a16="http://schemas.microsoft.com/office/drawing/2014/main" id="{9A307779-C1EC-00E0-3058-3209541CA81A}"/>
+                <a16:creationId xmlns:a16="http://schemas.microsoft.com/office/drawing/2014/main" id="{FB26A949-DC9A-CA08-3A32-B57162BE34E6}"/>
               </a:ext>
             </a:extLst>
           </p:cNvPr>
@@ -4555,7 +4555,7 @@
     </p:spTree>
     <p:extLst>
       <p:ext uri="{BB962C8B-B14F-4D97-AF65-F5344CB8AC3E}">
-        <p14:creationId xmlns:p14="http://schemas.microsoft.com/office/powerpoint/2010/main" val="1184095740"/>
+        <p14:creationId xmlns:p14="http://schemas.microsoft.com/office/powerpoint/2010/main" val="598915139"/>
       </p:ext>
     </p:extLst>
   </p:cSld>
@@ -4679,7 +4679,7 @@
           <p:cNvPr id="2" name="テキスト ボックス 1">
             <a:extLst>
               <a:ext uri="{FF2B5EF4-FFF2-40B4-BE49-F238E27FC236}">
-                <a16:creationId xmlns:a16="http://schemas.microsoft.com/office/drawing/2014/main" id="{2E3726A8-B9D9-AC80-7659-9FB9282CA768}"/>
+                <a16:creationId xmlns:a16="http://schemas.microsoft.com/office/drawing/2014/main" id="{422364F4-6555-1833-26DE-B4C30ADF3CDF}"/>
               </a:ext>
             </a:extLst>
           </p:cNvPr>
@@ -4725,7 +4725,7 @@
           <p:cNvPr id="3" name="テキスト ボックス 2">
             <a:extLst>
               <a:ext uri="{FF2B5EF4-FFF2-40B4-BE49-F238E27FC236}">
-                <a16:creationId xmlns:a16="http://schemas.microsoft.com/office/drawing/2014/main" id="{C3DAE8BD-D44A-8379-5E8A-A0155DA08266}"/>
+                <a16:creationId xmlns:a16="http://schemas.microsoft.com/office/drawing/2014/main" id="{D296A137-AAC7-1E67-48BE-3D140FAC67DF}"/>
               </a:ext>
             </a:extLst>
           </p:cNvPr>
@@ -4765,7 +4765,7 @@
           <p:cNvPr id="4" name="テキスト ボックス 3">
             <a:extLst>
               <a:ext uri="{FF2B5EF4-FFF2-40B4-BE49-F238E27FC236}">
-                <a16:creationId xmlns:a16="http://schemas.microsoft.com/office/drawing/2014/main" id="{54406CF2-BD1D-F745-6065-ABFAB941DE47}"/>
+                <a16:creationId xmlns:a16="http://schemas.microsoft.com/office/drawing/2014/main" id="{F5319E6D-6997-AAA3-7F3E-FF6FF9EAE3C7}"/>
               </a:ext>
             </a:extLst>
           </p:cNvPr>
@@ -4875,7 +4875,7 @@
           <p:cNvPr id="5" name="テキスト ボックス 4">
             <a:extLst>
               <a:ext uri="{FF2B5EF4-FFF2-40B4-BE49-F238E27FC236}">
-                <a16:creationId xmlns:a16="http://schemas.microsoft.com/office/drawing/2014/main" id="{324B762D-894E-C320-E5C3-B81819FB949F}"/>
+                <a16:creationId xmlns:a16="http://schemas.microsoft.com/office/drawing/2014/main" id="{CB205BCC-C7C3-D5DA-296D-64848DC8C84A}"/>
               </a:ext>
             </a:extLst>
           </p:cNvPr>
@@ -4922,7 +4922,7 @@
             <a:hlinkClick r:id="" action="ppaction://media"/>
             <a:extLst>
               <a:ext uri="{FF2B5EF4-FFF2-40B4-BE49-F238E27FC236}">
-                <a16:creationId xmlns:a16="http://schemas.microsoft.com/office/drawing/2014/main" id="{791EE667-EDE8-BBA8-A91E-A5E9B5AE2CCC}"/>
+                <a16:creationId xmlns:a16="http://schemas.microsoft.com/office/drawing/2014/main" id="{D54DACEB-B3A7-D00E-AF32-9C6AE4F59796}"/>
               </a:ext>
             </a:extLst>
           </p:cNvPr>
@@ -4957,7 +4957,7 @@
     </p:spTree>
     <p:extLst>
       <p:ext uri="{BB962C8B-B14F-4D97-AF65-F5344CB8AC3E}">
-        <p14:creationId xmlns:p14="http://schemas.microsoft.com/office/powerpoint/2010/main" val="966089549"/>
+        <p14:creationId xmlns:p14="http://schemas.microsoft.com/office/powerpoint/2010/main" val="502347018"/>
       </p:ext>
     </p:extLst>
   </p:cSld>
@@ -5081,7 +5081,7 @@
           <p:cNvPr id="2" name="テキスト ボックス 1">
             <a:extLst>
               <a:ext uri="{FF2B5EF4-FFF2-40B4-BE49-F238E27FC236}">
-                <a16:creationId xmlns:a16="http://schemas.microsoft.com/office/drawing/2014/main" id="{086AA8C7-2452-DF1D-B584-E3EC5532AEFF}"/>
+                <a16:creationId xmlns:a16="http://schemas.microsoft.com/office/drawing/2014/main" id="{8281611A-71E9-F6F7-83FF-E67398C0EB8A}"/>
               </a:ext>
             </a:extLst>
           </p:cNvPr>
@@ -5127,7 +5127,7 @@
           <p:cNvPr id="3" name="テキスト ボックス 2">
             <a:extLst>
               <a:ext uri="{FF2B5EF4-FFF2-40B4-BE49-F238E27FC236}">
-                <a16:creationId xmlns:a16="http://schemas.microsoft.com/office/drawing/2014/main" id="{90F74181-FE6A-DDB6-09AA-18E38D9519A3}"/>
+                <a16:creationId xmlns:a16="http://schemas.microsoft.com/office/drawing/2014/main" id="{AA2DD582-524A-D6C5-E6C8-4D0E58D3FE96}"/>
               </a:ext>
             </a:extLst>
           </p:cNvPr>
@@ -5167,7 +5167,7 @@
           <p:cNvPr id="4" name="テキスト ボックス 3">
             <a:extLst>
               <a:ext uri="{FF2B5EF4-FFF2-40B4-BE49-F238E27FC236}">
-                <a16:creationId xmlns:a16="http://schemas.microsoft.com/office/drawing/2014/main" id="{639EEE76-F1D4-E71E-A6B5-222BDB6E8D72}"/>
+                <a16:creationId xmlns:a16="http://schemas.microsoft.com/office/drawing/2014/main" id="{DAFD8FED-C1B0-1066-D60A-C22828E9830D}"/>
               </a:ext>
             </a:extLst>
           </p:cNvPr>
@@ -5191,20 +5191,14 @@
           <a:lstStyle/>
           <a:p>
             <a:r>
-              <a:rPr kumimoji="1" lang="en-US" altLang="ja-JP" sz="2000">
+              <a:rPr kumimoji="1" lang="ja-JP" altLang="en-US" sz="2000">
                 <a:solidFill>
                   <a:srgbClr val="333333"/>
                 </a:solidFill>
                 <a:latin typeface="Arial" panose="020B0604020202020204" pitchFamily="34" charset="0"/>
               </a:rPr>
-              <a:t>feat: prioritize helpful discovery on home</a:t>
-            </a:r>
-            <a:endParaRPr kumimoji="1" lang="ja-JP" altLang="en-US" sz="2000">
-              <a:solidFill>
-                <a:srgbClr val="333333"/>
-              </a:solidFill>
-              <a:latin typeface="Arial" panose="020B0604020202020204" pitchFamily="34" charset="0"/>
-            </a:endParaRPr>
+              <a:t>直近のコミットでは、実装の見直しと継続的な改善が行われました。</a:t>
+            </a:r>
           </a:p>
         </p:txBody>
       </p:sp>
@@ -5213,7 +5207,7 @@
           <p:cNvPr id="5" name="テキスト ボックス 4">
             <a:extLst>
               <a:ext uri="{FF2B5EF4-FFF2-40B4-BE49-F238E27FC236}">
-                <a16:creationId xmlns:a16="http://schemas.microsoft.com/office/drawing/2014/main" id="{DE431686-333A-57CC-9A0F-AB1313BAAEFF}"/>
+                <a16:creationId xmlns:a16="http://schemas.microsoft.com/office/drawing/2014/main" id="{E8D241FC-667D-EC46-BE98-26A1E69019F6}"/>
               </a:ext>
             </a:extLst>
           </p:cNvPr>
@@ -5260,7 +5254,7 @@
             <a:hlinkClick r:id="" action="ppaction://media"/>
             <a:extLst>
               <a:ext uri="{FF2B5EF4-FFF2-40B4-BE49-F238E27FC236}">
-                <a16:creationId xmlns:a16="http://schemas.microsoft.com/office/drawing/2014/main" id="{1DD19179-2E39-48D7-7FB0-F0D4E234B8B7}"/>
+                <a16:creationId xmlns:a16="http://schemas.microsoft.com/office/drawing/2014/main" id="{55C4480F-A13D-24FF-7E60-925EC30A576D}"/>
               </a:ext>
             </a:extLst>
           </p:cNvPr>
@@ -5295,7 +5289,7 @@
     </p:spTree>
     <p:extLst>
       <p:ext uri="{BB962C8B-B14F-4D97-AF65-F5344CB8AC3E}">
-        <p14:creationId xmlns:p14="http://schemas.microsoft.com/office/powerpoint/2010/main" val="2541472925"/>
+        <p14:creationId xmlns:p14="http://schemas.microsoft.com/office/powerpoint/2010/main" val="1029232702"/>
       </p:ext>
     </p:extLst>
   </p:cSld>
@@ -5304,10 +5298,10 @@
   </p:clrMapOvr>
   <mc:AlternateContent xmlns:mc="http://schemas.openxmlformats.org/markup-compatibility/2006">
     <mc:Choice xmlns:p14="http://schemas.microsoft.com/office/powerpoint/2010/main" Requires="p14">
-      <p:transition spd="slow" p14:dur="2000" advTm="8000"/>
+      <p:transition spd="slow" p14:dur="2000" advTm="7000"/>
     </mc:Choice>
     <mc:Fallback>
-      <p:transition spd="slow" advTm="8000"/>
+      <p:transition spd="slow" advTm="7000"/>
     </mc:Fallback>
   </mc:AlternateContent>
   <p:timing>
@@ -5338,7 +5332,7 @@
                                   <p:childTnLst>
                                     <p:cmd type="call" cmd="playFrom(0.0)">
                                       <p:cBhvr>
-                                        <p:cTn id="6" dur="7846" fill="hold"/>
+                                        <p:cTn id="6" dur="6076" fill="hold"/>
                                         <p:tgtEl>
                                           <p:spTgt spid="6"/>
                                         </p:tgtEl>
@@ -5419,7 +5413,7 @@
           <p:cNvPr id="2" name="テキスト ボックス 1">
             <a:extLst>
               <a:ext uri="{FF2B5EF4-FFF2-40B4-BE49-F238E27FC236}">
-                <a16:creationId xmlns:a16="http://schemas.microsoft.com/office/drawing/2014/main" id="{785BE269-8BD2-B470-06C3-E6D0168FD66B}"/>
+                <a16:creationId xmlns:a16="http://schemas.microsoft.com/office/drawing/2014/main" id="{165D8766-66C5-4E54-26C7-2146E8904BEA}"/>
               </a:ext>
             </a:extLst>
           </p:cNvPr>
@@ -5465,7 +5459,7 @@
           <p:cNvPr id="3" name="テキスト ボックス 2">
             <a:extLst>
               <a:ext uri="{FF2B5EF4-FFF2-40B4-BE49-F238E27FC236}">
-                <a16:creationId xmlns:a16="http://schemas.microsoft.com/office/drawing/2014/main" id="{25C6C81C-C0AF-EFA3-19EE-CD1399F1FEFD}"/>
+                <a16:creationId xmlns:a16="http://schemas.microsoft.com/office/drawing/2014/main" id="{0393DD1F-A132-7E6B-8858-6042FB8D2E24}"/>
               </a:ext>
             </a:extLst>
           </p:cNvPr>
@@ -5505,7 +5499,7 @@
           <p:cNvPr id="4" name="テキスト ボックス 3">
             <a:extLst>
               <a:ext uri="{FF2B5EF4-FFF2-40B4-BE49-F238E27FC236}">
-                <a16:creationId xmlns:a16="http://schemas.microsoft.com/office/drawing/2014/main" id="{2C968602-5877-D18D-F095-8C7761D6243F}"/>
+                <a16:creationId xmlns:a16="http://schemas.microsoft.com/office/drawing/2014/main" id="{A1202A6A-4EBA-8EA4-D0CE-B553FDFED59B}"/>
               </a:ext>
             </a:extLst>
           </p:cNvPr>
@@ -5570,7 +5564,7 @@
           <p:cNvPr id="5" name="テキスト ボックス 4">
             <a:extLst>
               <a:ext uri="{FF2B5EF4-FFF2-40B4-BE49-F238E27FC236}">
-                <a16:creationId xmlns:a16="http://schemas.microsoft.com/office/drawing/2014/main" id="{0556D854-E634-557E-CCFD-55B57E1881CA}"/>
+                <a16:creationId xmlns:a16="http://schemas.microsoft.com/office/drawing/2014/main" id="{C8F67F09-2E10-183F-BCBD-54C22DDFDE38}"/>
               </a:ext>
             </a:extLst>
           </p:cNvPr>
@@ -5617,7 +5611,7 @@
             <a:hlinkClick r:id="" action="ppaction://media"/>
             <a:extLst>
               <a:ext uri="{FF2B5EF4-FFF2-40B4-BE49-F238E27FC236}">
-                <a16:creationId xmlns:a16="http://schemas.microsoft.com/office/drawing/2014/main" id="{0A3C303D-C27B-6C4E-5C85-72B94B76CA89}"/>
+                <a16:creationId xmlns:a16="http://schemas.microsoft.com/office/drawing/2014/main" id="{5C7BA72F-B951-A714-7069-15DD7D2BD2F3}"/>
               </a:ext>
             </a:extLst>
           </p:cNvPr>
@@ -5652,7 +5646,7 @@
     </p:spTree>
     <p:extLst>
       <p:ext uri="{BB962C8B-B14F-4D97-AF65-F5344CB8AC3E}">
-        <p14:creationId xmlns:p14="http://schemas.microsoft.com/office/powerpoint/2010/main" val="3229141202"/>
+        <p14:creationId xmlns:p14="http://schemas.microsoft.com/office/powerpoint/2010/main" val="2565847320"/>
       </p:ext>
     </p:extLst>
   </p:cSld>
